--- a/docs/organized/documents/NGO_Connect_Architecture_Presentation.pptx
+++ b/docs/organized/documents/NGO_Connect_Architecture_Presentation.pptx
@@ -27,6 +27,9 @@
     <p:sldId id="275" r:id="rId26"/>
     <p:sldId id="276" r:id="rId27"/>
     <p:sldId id="277" r:id="rId28"/>
+    <p:sldId id="278" r:id="rId29"/>
+    <p:sldId id="279" r:id="rId30"/>
+    <p:sldId id="280" r:id="rId31"/>
   </p:sldIdLst>
   <p:sldSz cx="12191695" cy="6858000" type="screen4x3"/>
   <p:notesSz cx="6858000" cy="9144000"/>
@@ -3336,7 +3339,7 @@
               </a:defRPr>
             </a:pPr>
             <a:r>
-              <a:t>February 2026  |  Stakeholder Briefing</a:t>
+              <a:t>March 10, 2026  |  Stakeholder Briefing</a:t>
             </a:r>
           </a:p>
         </p:txBody>
@@ -3656,7 +3659,7 @@
               </a:defRPr>
             </a:pPr>
             <a:r>
-              <a:t>Database Schema (17 Tables)</a:t>
+              <a:t>Database Schema (35 Tables)</a:t>
             </a:r>
           </a:p>
         </p:txBody>
@@ -3692,7 +3695,7 @@
               </a:defRPr>
             </a:pPr>
             <a:r>
-              <a:t>Design: BIGSERIAL PK + UUID external_id + Typed relational columns + JSONB source_doc + Foreign Keys + Indexes</a:t>
+              <a:t>Design: BIGSERIAL PK + External ID + Typed relational columns + JSONB source_doc + Foreign Keys + Indexes</a:t>
             </a:r>
           </a:p>
         </p:txBody>
@@ -3728,7 +3731,7 @@
               </a:defRPr>
             </a:pPr>
             <a:r>
-              <a:t>Primary Tables (13)</a:t>
+              <a:t>Core Table Groups</a:t>
             </a:r>
           </a:p>
         </p:txBody>
@@ -3742,7 +3745,7 @@
         <p:spPr>
           <a:xfrm>
             <a:off x="914400" y="2468880"/>
-            <a:ext cx="5943600" cy="4114800"/>
+            <a:ext cx="5029200" cy="4114800"/>
           </a:xfrm>
           <a:prstGeom prst="rect">
             <a:avLst/>
@@ -3757,9 +3760,9 @@
           <a:p>
             <a:pPr>
               <a:spcAft>
-                <a:spcPts val="300"/>
+                <a:spcPts val="600"/>
               </a:spcAft>
-              <a:defRPr sz="1200">
+              <a:defRPr sz="1300">
                 <a:solidFill>
                   <a:srgbClr val="1A1A2E"/>
                 </a:solidFill>
@@ -3767,15 +3770,15 @@
               </a:defRPr>
             </a:pPr>
             <a:r>
-              <a:t>users_rel — Platform users (donor, volunteer, admin)</a:t>
+              <a:t>users_rel, ngos_rel, categories_rel</a:t>
             </a:r>
           </a:p>
           <a:p>
             <a:pPr>
               <a:spcAft>
-                <a:spcPts val="300"/>
+                <a:spcPts val="600"/>
               </a:spcAft>
-              <a:defRPr sz="1200">
+              <a:defRPr sz="1300">
                 <a:solidFill>
                   <a:srgbClr val="1A1A2E"/>
                 </a:solidFill>
@@ -3783,15 +3786,15 @@
               </a:defRPr>
             </a:pPr>
             <a:r>
-              <a:t>ngos_rel — NGO organizations</a:t>
+              <a:t>campaigns_rel, donations_rel</a:t>
             </a:r>
           </a:p>
           <a:p>
             <a:pPr>
               <a:spcAft>
-                <a:spcPts val="300"/>
+                <a:spcPts val="600"/>
               </a:spcAft>
-              <a:defRPr sz="1200">
+              <a:defRPr sz="1300">
                 <a:solidFill>
                   <a:srgbClr val="1A1A2E"/>
                 </a:solidFill>
@@ -3799,15 +3802,15 @@
               </a:defRPr>
             </a:pPr>
             <a:r>
-              <a:t>categories_rel — NGO/campaign categories</a:t>
+              <a:t>volunteer_opportunities_rel, volunteer_applications_rel</a:t>
             </a:r>
           </a:p>
           <a:p>
             <a:pPr>
               <a:spcAft>
-                <a:spcPts val="300"/>
+                <a:spcPts val="600"/>
               </a:spcAft>
-              <a:defRPr sz="1200">
+              <a:defRPr sz="1300">
                 <a:solidFill>
                   <a:srgbClr val="1A1A2E"/>
                 </a:solidFill>
@@ -3815,15 +3818,15 @@
               </a:defRPr>
             </a:pPr>
             <a:r>
-              <a:t>campaigns_rel — Fundraising campaigns → ngos_rel</a:t>
+              <a:t>certificates_rel, messages_rel, notifications_rel</a:t>
             </a:r>
           </a:p>
           <a:p>
             <a:pPr>
               <a:spcAft>
-                <a:spcPts val="300"/>
+                <a:spcPts val="600"/>
               </a:spcAft>
-              <a:defRPr sz="1200">
+              <a:defRPr sz="1300">
                 <a:solidFill>
                   <a:srgbClr val="1A1A2E"/>
                 </a:solidFill>
@@ -3831,135 +3834,7 @@
               </a:defRPr>
             </a:pPr>
             <a:r>
-              <a:t>donations_rel — Financial contributions → users, campaigns, ngos</a:t>
-            </a:r>
-          </a:p>
-          <a:p>
-            <a:pPr>
-              <a:spcAft>
-                <a:spcPts val="300"/>
-              </a:spcAft>
-              <a:defRPr sz="1200">
-                <a:solidFill>
-                  <a:srgbClr val="1A1A2E"/>
-                </a:solidFill>
-                <a:latin typeface="Calibri"/>
-              </a:defRPr>
-            </a:pPr>
-            <a:r>
-              <a:t>volunteer_opportunities_rel — Volunteer positions → ngos</a:t>
-            </a:r>
-          </a:p>
-          <a:p>
-            <a:pPr>
-              <a:spcAft>
-                <a:spcPts val="300"/>
-              </a:spcAft>
-              <a:defRPr sz="1200">
-                <a:solidFill>
-                  <a:srgbClr val="1A1A2E"/>
-                </a:solidFill>
-                <a:latin typeface="Calibri"/>
-              </a:defRPr>
-            </a:pPr>
-            <a:r>
-              <a:t>volunteer_applications_rel — Applications → users, opportunities</a:t>
-            </a:r>
-          </a:p>
-          <a:p>
-            <a:pPr>
-              <a:spcAft>
-                <a:spcPts val="300"/>
-              </a:spcAft>
-              <a:defRPr sz="1200">
-                <a:solidFill>
-                  <a:srgbClr val="1A1A2E"/>
-                </a:solidFill>
-                <a:latin typeface="Calibri"/>
-              </a:defRPr>
-            </a:pPr>
-            <a:r>
-              <a:t>certificates_rel — Donation &amp; volunteer certificates</a:t>
-            </a:r>
-          </a:p>
-          <a:p>
-            <a:pPr>
-              <a:spcAft>
-                <a:spcPts val="300"/>
-              </a:spcAft>
-              <a:defRPr sz="1200">
-                <a:solidFill>
-                  <a:srgbClr val="1A1A2E"/>
-                </a:solidFill>
-                <a:latin typeface="Calibri"/>
-              </a:defRPr>
-            </a:pPr>
-            <a:r>
-              <a:t>messages_rel — User ↔ NGO messaging</a:t>
-            </a:r>
-          </a:p>
-          <a:p>
-            <a:pPr>
-              <a:spcAft>
-                <a:spcPts val="300"/>
-              </a:spcAft>
-              <a:defRPr sz="1200">
-                <a:solidFill>
-                  <a:srgbClr val="1A1A2E"/>
-                </a:solidFill>
-                <a:latin typeface="Calibri"/>
-              </a:defRPr>
-            </a:pPr>
-            <a:r>
-              <a:t>notifications_rel — Platform notifications</a:t>
-            </a:r>
-          </a:p>
-          <a:p>
-            <a:pPr>
-              <a:spcAft>
-                <a:spcPts val="300"/>
-              </a:spcAft>
-              <a:defRPr sz="1200">
-                <a:solidFill>
-                  <a:srgbClr val="1A1A2E"/>
-                </a:solidFill>
-                <a:latin typeface="Calibri"/>
-              </a:defRPr>
-            </a:pPr>
-            <a:r>
-              <a:t>help_requests_rel — Support requests → users, ngos</a:t>
-            </a:r>
-          </a:p>
-          <a:p>
-            <a:pPr>
-              <a:spcAft>
-                <a:spcPts val="300"/>
-              </a:spcAft>
-              <a:defRPr sz="1200">
-                <a:solidFill>
-                  <a:srgbClr val="1A1A2E"/>
-                </a:solidFill>
-                <a:latin typeface="Calibri"/>
-              </a:defRPr>
-            </a:pPr>
-            <a:r>
-              <a:t>flag_requests_rel — Content moderation flags</a:t>
-            </a:r>
-          </a:p>
-          <a:p>
-            <a:pPr>
-              <a:spcAft>
-                <a:spcPts val="300"/>
-              </a:spcAft>
-              <a:defRPr sz="1200">
-                <a:solidFill>
-                  <a:srgbClr val="1A1A2E"/>
-                </a:solidFill>
-                <a:latin typeface="Calibri"/>
-              </a:defRPr>
-            </a:pPr>
-            <a:r>
-              <a:t>ai_logs_rel — AI operation audit trail</a:t>
+              <a:t>help_requests_rel, flag_requests_rel, ai_logs_rel</a:t>
             </a:r>
           </a:p>
         </p:txBody>
@@ -3972,8 +3847,8 @@
         </p:nvSpPr>
         <p:spPr>
           <a:xfrm>
-            <a:off x="7315200" y="1920240"/>
-            <a:ext cx="4114800" cy="457200"/>
+            <a:off x="6583680" y="1920240"/>
+            <a:ext cx="5029200" cy="457200"/>
           </a:xfrm>
           <a:prstGeom prst="rect">
             <a:avLst/>
@@ -3995,7 +3870,7 @@
               </a:defRPr>
             </a:pPr>
             <a:r>
-              <a:t>Junction Tables (4)</a:t>
+              <a:t>Innovation &amp; Ops Tables</a:t>
             </a:r>
           </a:p>
         </p:txBody>
@@ -4008,8 +3883,8 @@
         </p:nvSpPr>
         <p:spPr>
           <a:xfrm>
-            <a:off x="7498079" y="2468880"/>
-            <a:ext cx="3931920" cy="2743200"/>
+            <a:off x="6766560" y="2468880"/>
+            <a:ext cx="5029200" cy="4114800"/>
           </a:xfrm>
           <a:prstGeom prst="rect">
             <a:avLst/>
@@ -4024,7 +3899,7 @@
           <a:p>
             <a:pPr>
               <a:spcAft>
-                <a:spcPts val="800"/>
+                <a:spcPts val="600"/>
               </a:spcAft>
               <a:defRPr sz="1300">
                 <a:solidFill>
@@ -4034,17 +3909,13 @@
               </a:defRPr>
             </a:pPr>
             <a:r>
-              <a:t>ngo_categories_rel</a:t>
-            </a:r>
-            <a:br/>
-            <a:r>
-              <a:t>  NGO ↔ Category names</a:t>
+              <a:t>giving_circles_rel, circle_members_rel, circle_contributions_rel</a:t>
             </a:r>
           </a:p>
           <a:p>
             <a:pPr>
               <a:spcAft>
-                <a:spcPts val="800"/>
+                <a:spcPts val="600"/>
               </a:spcAft>
               <a:defRPr sz="1300">
                 <a:solidFill>
@@ -4054,17 +3925,13 @@
               </a:defRPr>
             </a:pPr>
             <a:r>
-              <a:t>campaign_volunteers_rel</a:t>
-            </a:r>
-            <a:br/>
-            <a:r>
-              <a:t>  Campaign ↔ User volunteers</a:t>
+              <a:t>wishlist_items_rel, in_kind_pledges_rel</a:t>
             </a:r>
           </a:p>
           <a:p>
             <a:pPr>
               <a:spcAft>
-                <a:spcPts val="800"/>
+                <a:spcPts val="600"/>
               </a:spcAft>
               <a:defRPr sz="1300">
                 <a:solidFill>
@@ -4074,17 +3941,13 @@
               </a:defRPr>
             </a:pPr>
             <a:r>
-              <a:t>campaign_volunteer_registrations_rel</a:t>
-            </a:r>
-            <a:br/>
-            <a:r>
-              <a:t>  Campaign sign-ups with details</a:t>
+              <a:t>volunteer_shifts_rel, volunteer_shift_signups_rel, volunteer_logs_rel</a:t>
             </a:r>
           </a:p>
           <a:p>
             <a:pPr>
               <a:spcAft>
-                <a:spcPts val="800"/>
+                <a:spcPts val="600"/>
               </a:spcAft>
               <a:defRPr sz="1300">
                 <a:solidFill>
@@ -4094,25 +3957,113 @@
               </a:defRPr>
             </a:pPr>
             <a:r>
-              <a:t>opportunity_applicants_rel</a:t>
-            </a:r>
-            <a:br/>
-            <a:r>
-              <a:t>  Opportunity ↔ User applicants</a:t>
-            </a:r>
-          </a:p>
-        </p:txBody>
-      </p:sp>
-      <p:sp>
-        <p:nvSpPr>
-          <p:cNvPr id="10" name="TextBox 9"/>
+              <a:t>donor_notes_rel, donor_segments_rel, donor_segment_members_rel</a:t>
+            </a:r>
+          </a:p>
+          <a:p>
+            <a:pPr>
+              <a:spcAft>
+                <a:spcPts val="600"/>
+              </a:spcAft>
+              <a:defRPr sz="1300">
+                <a:solidFill>
+                  <a:srgbClr val="1A1A2E"/>
+                </a:solidFill>
+                <a:latin typeface="Calibri"/>
+              </a:defRPr>
+            </a:pPr>
+            <a:r>
+              <a:t>impact_updates_rel, corporate_profiles_rel, corporate_matches_rel</a:t>
+            </a:r>
+          </a:p>
+          <a:p>
+            <a:pPr>
+              <a:spcAft>
+                <a:spcPts val="600"/>
+              </a:spcAft>
+              <a:defRPr sz="1300">
+                <a:solidFill>
+                  <a:srgbClr val="1A1A2E"/>
+                </a:solidFill>
+                <a:latin typeface="Calibri"/>
+              </a:defRPr>
+            </a:pPr>
+            <a:r>
+              <a:t>volunteer_endorsements_rel</a:t>
+            </a:r>
+          </a:p>
+          <a:p>
+            <a:pPr>
+              <a:spcAft>
+                <a:spcPts val="600"/>
+              </a:spcAft>
+              <a:defRPr sz="1300">
+                <a:solidFill>
+                  <a:srgbClr val="1A1A2E"/>
+                </a:solidFill>
+                <a:latin typeface="Calibri"/>
+              </a:defRPr>
+            </a:pPr>
+            <a:r>
+              <a:t>webhook_deliveries_rel (for outbound event reliability)</a:t>
+            </a:r>
+          </a:p>
+        </p:txBody>
+      </p:sp>
+      <p:sp>
+        <p:nvSpPr>
+          <p:cNvPr id="10" name="Rectangle 9"/>
+          <p:cNvSpPr/>
+          <p:nvPr/>
+        </p:nvSpPr>
+        <p:spPr>
+          <a:xfrm>
+            <a:off x="0" y="6492240"/>
+            <a:ext cx="12191695" cy="9144"/>
+          </a:xfrm>
+          <a:prstGeom prst="rect">
+            <a:avLst/>
+          </a:prstGeom>
+          <a:solidFill>
+            <a:srgbClr val="D9E2EC"/>
+          </a:solidFill>
+          <a:ln>
+            <a:noFill/>
+          </a:ln>
+          <a:effectLst/>
+        </p:spPr>
+        <p:style>
+          <a:lnRef idx="1">
+            <a:schemeClr val="accent1"/>
+          </a:lnRef>
+          <a:fillRef idx="3">
+            <a:schemeClr val="accent1"/>
+          </a:fillRef>
+          <a:effectRef idx="2">
+            <a:schemeClr val="accent1"/>
+          </a:effectRef>
+          <a:fontRef idx="minor">
+            <a:schemeClr val="lt1"/>
+          </a:fontRef>
+        </p:style>
+        <p:txBody>
+          <a:bodyPr rtlCol="0" anchor="ctr"/>
+          <a:lstStyle/>
+          <a:p>
+            <a:pPr algn="ctr"/>
+          </a:p>
+        </p:txBody>
+      </p:sp>
+      <p:sp>
+        <p:nvSpPr>
+          <p:cNvPr id="11" name="TextBox 10"/>
           <p:cNvSpPr txBox="1"/>
           <p:nvPr/>
         </p:nvSpPr>
         <p:spPr>
           <a:xfrm>
-            <a:off x="7315200" y="4389120"/>
-            <a:ext cx="4114800" cy="457200"/>
+            <a:off x="320040" y="6565392"/>
+            <a:ext cx="5943600" cy="228600"/>
           </a:xfrm>
           <a:prstGeom prst="rect">
             <a:avLst/>
@@ -4126,29 +4077,29 @@
           <a:lstStyle/>
           <a:p>
             <a:pPr algn="l">
-              <a:defRPr sz="2000" b="1">
-                <a:solidFill>
-                  <a:srgbClr val="1E88E5"/>
-                </a:solidFill>
-                <a:latin typeface="Calibri"/>
-              </a:defRPr>
-            </a:pPr>
-            <a:r>
-              <a:t>Key Relationships</a:t>
-            </a:r>
-          </a:p>
-        </p:txBody>
-      </p:sp>
-      <p:sp>
-        <p:nvSpPr>
-          <p:cNvPr id="11" name="TextBox 10"/>
+              <a:defRPr sz="1000" b="0">
+                <a:solidFill>
+                  <a:srgbClr val="555555"/>
+                </a:solidFill>
+                <a:latin typeface="Calibri"/>
+              </a:defRPr>
+            </a:pPr>
+            <a:r>
+              <a:t>NGO-Connect | Architecture, Delivery, and Validation</a:t>
+            </a:r>
+          </a:p>
+        </p:txBody>
+      </p:sp>
+      <p:sp>
+        <p:nvSpPr>
+          <p:cNvPr id="12" name="TextBox 11"/>
           <p:cNvSpPr txBox="1"/>
           <p:nvPr/>
         </p:nvSpPr>
         <p:spPr>
           <a:xfrm>
-            <a:off x="7498079" y="4937760"/>
-            <a:ext cx="3931920" cy="1828800"/>
+            <a:off x="9326880" y="6565392"/>
+            <a:ext cx="2468880" cy="228600"/>
           </a:xfrm>
           <a:prstGeom prst="rect">
             <a:avLst/>
@@ -4161,83 +4112,16 @@
           </a:bodyPr>
           <a:lstStyle/>
           <a:p>
-            <a:pPr>
-              <a:spcAft>
-                <a:spcPts val="400"/>
-              </a:spcAft>
-              <a:defRPr sz="1300">
-                <a:solidFill>
-                  <a:srgbClr val="1A1A2E"/>
-                </a:solidFill>
-                <a:latin typeface="Calibri"/>
-              </a:defRPr>
-            </a:pPr>
-            <a:r>
-              <a:t>campaigns → ngos (ngo_id FK)</a:t>
-            </a:r>
-          </a:p>
-          <a:p>
-            <a:pPr>
-              <a:spcAft>
-                <a:spcPts val="400"/>
-              </a:spcAft>
-              <a:defRPr sz="1300">
-                <a:solidFill>
-                  <a:srgbClr val="1A1A2E"/>
-                </a:solidFill>
-                <a:latin typeface="Calibri"/>
-              </a:defRPr>
-            </a:pPr>
-            <a:r>
-              <a:t>donations → users, campaigns, ngos</a:t>
-            </a:r>
-          </a:p>
-          <a:p>
-            <a:pPr>
-              <a:spcAft>
-                <a:spcPts val="400"/>
-              </a:spcAft>
-              <a:defRPr sz="1300">
-                <a:solidFill>
-                  <a:srgbClr val="1A1A2E"/>
-                </a:solidFill>
-                <a:latin typeface="Calibri"/>
-              </a:defRPr>
-            </a:pPr>
-            <a:r>
-              <a:t>vol. applications → users, opportunities</a:t>
-            </a:r>
-          </a:p>
-          <a:p>
-            <a:pPr>
-              <a:spcAft>
-                <a:spcPts val="400"/>
-              </a:spcAft>
-              <a:defRPr sz="1300">
-                <a:solidFill>
-                  <a:srgbClr val="1A1A2E"/>
-                </a:solidFill>
-                <a:latin typeface="Calibri"/>
-              </a:defRPr>
-            </a:pPr>
-            <a:r>
-              <a:t>certificates → donations | vol. applications</a:t>
-            </a:r>
-          </a:p>
-          <a:p>
-            <a:pPr>
-              <a:spcAft>
-                <a:spcPts val="400"/>
-              </a:spcAft>
-              <a:defRPr sz="1300">
-                <a:solidFill>
-                  <a:srgbClr val="1A1A2E"/>
-                </a:solidFill>
-                <a:latin typeface="Calibri"/>
-              </a:defRPr>
-            </a:pPr>
-            <a:r>
-              <a:t>messages: from_user ↔ to_ngo</a:t>
+            <a:pPr algn="r">
+              <a:defRPr sz="1000" b="0">
+                <a:solidFill>
+                  <a:srgbClr val="555555"/>
+                </a:solidFill>
+                <a:latin typeface="Calibri"/>
+              </a:defRPr>
+            </a:pPr>
+            <a:r>
+              <a:t>Slide 11/25</a:t>
             </a:r>
           </a:p>
         </p:txBody>
@@ -4415,7 +4299,7 @@
               </a:defRPr>
             </a:pPr>
             <a:r>
-              <a:t>89 Endpoints across 13 Route Modules</a:t>
+              <a:t>149 Endpoints across 14 Route Modules</a:t>
             </a:r>
           </a:p>
         </p:txBody>
@@ -4571,7 +4455,7 @@
         <p:spPr>
           <a:xfrm>
             <a:off x="2560320" y="1371600"/>
-            <a:ext cx="5486400" cy="411480"/>
+            <a:ext cx="5029200" cy="411480"/>
           </a:xfrm>
           <a:prstGeom prst="roundRect">
             <a:avLst/>
@@ -4637,7 +4521,7 @@
               </a:defRPr>
             </a:pPr>
             <a:r>
-              <a:t>/api/admin</a:t>
+              <a:t>/api/innovation</a:t>
             </a:r>
           </a:p>
         </p:txBody>
@@ -4650,7 +4534,7 @@
         </p:nvSpPr>
         <p:spPr>
           <a:xfrm>
-            <a:off x="8183880" y="1371600"/>
+            <a:off x="7726680" y="1371600"/>
             <a:ext cx="640080" cy="411480"/>
           </a:xfrm>
           <a:prstGeom prst="rect">
@@ -4673,7 +4557,7 @@
               </a:defRPr>
             </a:pPr>
             <a:r>
-              <a:t>18</a:t>
+              <a:t>44</a:t>
             </a:r>
           </a:p>
         </p:txBody>
@@ -4687,7 +4571,7 @@
         <p:spPr>
           <a:xfrm>
             <a:off x="2560320" y="2011680"/>
-            <a:ext cx="3657600" cy="411480"/>
+            <a:ext cx="2857500" cy="411480"/>
           </a:xfrm>
           <a:prstGeom prst="roundRect">
             <a:avLst/>
@@ -4753,7 +4637,7 @@
               </a:defRPr>
             </a:pPr>
             <a:r>
-              <a:t>/api/volunteering</a:t>
+              <a:t>/api/admin</a:t>
             </a:r>
           </a:p>
         </p:txBody>
@@ -4766,7 +4650,7 @@
         </p:nvSpPr>
         <p:spPr>
           <a:xfrm>
-            <a:off x="6355080" y="2011680"/>
+            <a:off x="5554980" y="2011680"/>
             <a:ext cx="640080" cy="411480"/>
           </a:xfrm>
           <a:prstGeom prst="rect">
@@ -4789,7 +4673,7 @@
               </a:defRPr>
             </a:pPr>
             <a:r>
-              <a:t>12</a:t>
+              <a:t>25</a:t>
             </a:r>
           </a:p>
         </p:txBody>
@@ -4803,7 +4687,7 @@
         <p:spPr>
           <a:xfrm>
             <a:off x="2560320" y="2651760"/>
-            <a:ext cx="3352800" cy="411480"/>
+            <a:ext cx="1600200" cy="411480"/>
           </a:xfrm>
           <a:prstGeom prst="roundRect">
             <a:avLst/>
@@ -4882,7 +4766,7 @@
         </p:nvSpPr>
         <p:spPr>
           <a:xfrm>
-            <a:off x="6050280" y="2651760"/>
+            <a:off x="4297680" y="2651760"/>
             <a:ext cx="640080" cy="411480"/>
           </a:xfrm>
           <a:prstGeom prst="rect">
@@ -4905,7 +4789,7 @@
               </a:defRPr>
             </a:pPr>
             <a:r>
-              <a:t>11</a:t>
+              <a:t>14</a:t>
             </a:r>
           </a:p>
         </p:txBody>
@@ -4919,7 +4803,7 @@
         <p:spPr>
           <a:xfrm>
             <a:off x="2560320" y="3291839"/>
-            <a:ext cx="2438400" cy="411480"/>
+            <a:ext cx="1371600" cy="411480"/>
           </a:xfrm>
           <a:prstGeom prst="roundRect">
             <a:avLst/>
@@ -4985,7 +4869,7 @@
               </a:defRPr>
             </a:pPr>
             <a:r>
-              <a:t>/api/donations</a:t>
+              <a:t>/api/volunteering</a:t>
             </a:r>
           </a:p>
         </p:txBody>
@@ -4998,7 +4882,7 @@
         </p:nvSpPr>
         <p:spPr>
           <a:xfrm>
-            <a:off x="5135880" y="3291839"/>
+            <a:off x="4069080" y="3291839"/>
             <a:ext cx="640080" cy="411480"/>
           </a:xfrm>
           <a:prstGeom prst="rect">
@@ -5021,7 +4905,7 @@
               </a:defRPr>
             </a:pPr>
             <a:r>
-              <a:t>8</a:t>
+              <a:t>12</a:t>
             </a:r>
           </a:p>
         </p:txBody>
@@ -5035,7 +4919,7 @@
         <p:spPr>
           <a:xfrm>
             <a:off x="2560320" y="3931920"/>
-            <a:ext cx="2133600" cy="411480"/>
+            <a:ext cx="1143000" cy="411480"/>
           </a:xfrm>
           <a:prstGeom prst="roundRect">
             <a:avLst/>
@@ -5114,7 +4998,7 @@
         </p:nvSpPr>
         <p:spPr>
           <a:xfrm>
-            <a:off x="4831080" y="3931920"/>
+            <a:off x="3840480" y="3931920"/>
             <a:ext cx="640080" cy="411480"/>
           </a:xfrm>
           <a:prstGeom prst="rect">
@@ -5137,7 +5021,7 @@
               </a:defRPr>
             </a:pPr>
             <a:r>
-              <a:t>7</a:t>
+              <a:t>10</a:t>
             </a:r>
           </a:p>
         </p:txBody>
@@ -5151,7 +5035,7 @@
         <p:spPr>
           <a:xfrm>
             <a:off x="2560320" y="4572000"/>
-            <a:ext cx="2133600" cy="411480"/>
+            <a:ext cx="914400" cy="411480"/>
           </a:xfrm>
           <a:prstGeom prst="roundRect">
             <a:avLst/>
@@ -5217,7 +5101,7 @@
               </a:defRPr>
             </a:pPr>
             <a:r>
-              <a:t>/api/messages</a:t>
+              <a:t>/api/ai</a:t>
             </a:r>
           </a:p>
         </p:txBody>
@@ -5230,7 +5114,7 @@
         </p:nvSpPr>
         <p:spPr>
           <a:xfrm>
-            <a:off x="4831080" y="4572000"/>
+            <a:off x="3611880" y="4572000"/>
             <a:ext cx="640080" cy="411480"/>
           </a:xfrm>
           <a:prstGeom prst="rect">
@@ -5253,7 +5137,7 @@
               </a:defRPr>
             </a:pPr>
             <a:r>
-              <a:t>7</a:t>
+              <a:t>8</a:t>
             </a:r>
           </a:p>
         </p:txBody>
@@ -5267,7 +5151,7 @@
         <p:spPr>
           <a:xfrm>
             <a:off x="2560320" y="5212079"/>
-            <a:ext cx="1828800" cy="411480"/>
+            <a:ext cx="914400" cy="411480"/>
           </a:xfrm>
           <a:prstGeom prst="roundRect">
             <a:avLst/>
@@ -5333,7 +5217,7 @@
               </a:defRPr>
             </a:pPr>
             <a:r>
-              <a:t>/api/ai</a:t>
+              <a:t>/api/donations</a:t>
             </a:r>
           </a:p>
         </p:txBody>
@@ -5346,7 +5230,7 @@
         </p:nvSpPr>
         <p:spPr>
           <a:xfrm>
-            <a:off x="4526280" y="5212079"/>
+            <a:off x="3611880" y="5212079"/>
             <a:ext cx="640080" cy="411480"/>
           </a:xfrm>
           <a:prstGeom prst="rect">
@@ -5369,7 +5253,7 @@
               </a:defRPr>
             </a:pPr>
             <a:r>
-              <a:t>6</a:t>
+              <a:t>8</a:t>
             </a:r>
           </a:p>
         </p:txBody>
@@ -5383,7 +5267,7 @@
         <p:spPr>
           <a:xfrm>
             <a:off x="8503920" y="1371600"/>
-            <a:ext cx="1524000" cy="411480"/>
+            <a:ext cx="800100" cy="411480"/>
           </a:xfrm>
           <a:prstGeom prst="roundRect">
             <a:avLst/>
@@ -5449,7 +5333,7 @@
               </a:defRPr>
             </a:pPr>
             <a:r>
-              <a:t>/api/categories</a:t>
+              <a:t>/api/messages</a:t>
             </a:r>
           </a:p>
         </p:txBody>
@@ -5462,7 +5346,7 @@
         </p:nvSpPr>
         <p:spPr>
           <a:xfrm>
-            <a:off x="10165080" y="1371600"/>
+            <a:off x="9441180" y="1371600"/>
             <a:ext cx="640080" cy="411480"/>
           </a:xfrm>
           <a:prstGeom prst="rect">
@@ -5485,7 +5369,7 @@
               </a:defRPr>
             </a:pPr>
             <a:r>
-              <a:t>5</a:t>
+              <a:t>7</a:t>
             </a:r>
           </a:p>
         </p:txBody>
@@ -5499,7 +5383,7 @@
         <p:spPr>
           <a:xfrm>
             <a:off x="8503920" y="2011680"/>
-            <a:ext cx="1219200" cy="411480"/>
+            <a:ext cx="571500" cy="411480"/>
           </a:xfrm>
           <a:prstGeom prst="roundRect">
             <a:avLst/>
@@ -5565,7 +5449,7 @@
               </a:defRPr>
             </a:pPr>
             <a:r>
-              <a:t>/api/auth</a:t>
+              <a:t>/api/categories</a:t>
             </a:r>
           </a:p>
         </p:txBody>
@@ -5578,7 +5462,7 @@
         </p:nvSpPr>
         <p:spPr>
           <a:xfrm>
-            <a:off x="9860280" y="2011680"/>
+            <a:off x="9212580" y="2011680"/>
             <a:ext cx="640080" cy="411480"/>
           </a:xfrm>
           <a:prstGeom prst="rect">
@@ -5601,7 +5485,7 @@
               </a:defRPr>
             </a:pPr>
             <a:r>
-              <a:t>4</a:t>
+              <a:t>5</a:t>
             </a:r>
           </a:p>
         </p:txBody>
@@ -5615,7 +5499,7 @@
         <p:spPr>
           <a:xfrm>
             <a:off x="8503920" y="2651760"/>
-            <a:ext cx="1219200" cy="411480"/>
+            <a:ext cx="457200" cy="411480"/>
           </a:xfrm>
           <a:prstGeom prst="roundRect">
             <a:avLst/>
@@ -5681,7 +5565,7 @@
               </a:defRPr>
             </a:pPr>
             <a:r>
-              <a:t>/api/requests</a:t>
+              <a:t>/api/auth</a:t>
             </a:r>
           </a:p>
         </p:txBody>
@@ -5694,7 +5578,7 @@
         </p:nvSpPr>
         <p:spPr>
           <a:xfrm>
-            <a:off x="9860280" y="2651760"/>
+            <a:off x="9098280" y="2651760"/>
             <a:ext cx="640080" cy="411480"/>
           </a:xfrm>
           <a:prstGeom prst="rect">
@@ -5731,7 +5615,7 @@
         <p:spPr>
           <a:xfrm>
             <a:off x="8503920" y="3291839"/>
-            <a:ext cx="914400" cy="411480"/>
+            <a:ext cx="457200" cy="411480"/>
           </a:xfrm>
           <a:prstGeom prst="roundRect">
             <a:avLst/>
@@ -5797,7 +5681,7 @@
               </a:defRPr>
             </a:pPr>
             <a:r>
-              <a:t>/api/users</a:t>
+              <a:t>/api/requests</a:t>
             </a:r>
           </a:p>
         </p:txBody>
@@ -5810,7 +5694,7 @@
         </p:nvSpPr>
         <p:spPr>
           <a:xfrm>
-            <a:off x="9555480" y="3291839"/>
+            <a:off x="9098280" y="3291839"/>
             <a:ext cx="640080" cy="411480"/>
           </a:xfrm>
           <a:prstGeom prst="rect">
@@ -5833,7 +5717,7 @@
               </a:defRPr>
             </a:pPr>
             <a:r>
-              <a:t>3</a:t>
+              <a:t>4</a:t>
             </a:r>
           </a:p>
         </p:txBody>
@@ -5847,7 +5731,7 @@
         <p:spPr>
           <a:xfrm>
             <a:off x="8503920" y="3931920"/>
-            <a:ext cx="914400" cy="411480"/>
+            <a:ext cx="342900" cy="411480"/>
           </a:xfrm>
           <a:prstGeom prst="roundRect">
             <a:avLst/>
@@ -5926,7 +5810,7 @@
         </p:nvSpPr>
         <p:spPr>
           <a:xfrm>
-            <a:off x="9555480" y="3931920"/>
+            <a:off x="8983980" y="3931920"/>
             <a:ext cx="640080" cy="411480"/>
           </a:xfrm>
           <a:prstGeom prst="rect">
@@ -5963,7 +5847,7 @@
         <p:spPr>
           <a:xfrm>
             <a:off x="8503920" y="4572000"/>
-            <a:ext cx="304800" cy="411480"/>
+            <a:ext cx="342900" cy="411480"/>
           </a:xfrm>
           <a:prstGeom prst="roundRect">
             <a:avLst/>
@@ -6029,7 +5913,7 @@
               </a:defRPr>
             </a:pPr>
             <a:r>
-              <a:t>/api/notifications</a:t>
+              <a:t>/api/users</a:t>
             </a:r>
           </a:p>
         </p:txBody>
@@ -6042,7 +5926,7 @@
         </p:nvSpPr>
         <p:spPr>
           <a:xfrm>
-            <a:off x="8945880" y="4572000"/>
+            <a:off x="8983980" y="4572000"/>
             <a:ext cx="640080" cy="411480"/>
           </a:xfrm>
           <a:prstGeom prst="rect">
@@ -6065,21 +5949,65 @@
               </a:defRPr>
             </a:pPr>
             <a:r>
-              <a:t>1</a:t>
-            </a:r>
-          </a:p>
-        </p:txBody>
-      </p:sp>
-      <p:sp>
-        <p:nvSpPr>
-          <p:cNvPr id="44" name="TextBox 43"/>
+              <a:t>3</a:t>
+            </a:r>
+          </a:p>
+        </p:txBody>
+      </p:sp>
+      <p:sp>
+        <p:nvSpPr>
+          <p:cNvPr id="44" name="Rounded Rectangle 43"/>
+          <p:cNvSpPr/>
+          <p:nvPr/>
+        </p:nvSpPr>
+        <p:spPr>
+          <a:xfrm>
+            <a:off x="8503920" y="5212079"/>
+            <a:ext cx="228600" cy="411480"/>
+          </a:xfrm>
+          <a:prstGeom prst="roundRect">
+            <a:avLst/>
+          </a:prstGeom>
+          <a:solidFill>
+            <a:srgbClr val="78909C"/>
+          </a:solidFill>
+          <a:ln>
+            <a:noFill/>
+          </a:ln>
+          <a:effectLst/>
+        </p:spPr>
+        <p:style>
+          <a:lnRef idx="1">
+            <a:schemeClr val="accent1"/>
+          </a:lnRef>
+          <a:fillRef idx="3">
+            <a:schemeClr val="accent1"/>
+          </a:fillRef>
+          <a:effectRef idx="2">
+            <a:schemeClr val="accent1"/>
+          </a:effectRef>
+          <a:fontRef idx="minor">
+            <a:schemeClr val="lt1"/>
+          </a:fontRef>
+        </p:style>
+        <p:txBody>
+          <a:bodyPr rtlCol="0" anchor="ctr"/>
+          <a:lstStyle/>
+          <a:p>
+            <a:pPr algn="ctr"/>
+          </a:p>
+        </p:txBody>
+      </p:sp>
+      <p:sp>
+        <p:nvSpPr>
+          <p:cNvPr id="45" name="TextBox 44"/>
           <p:cNvSpPr txBox="1"/>
           <p:nvPr/>
         </p:nvSpPr>
         <p:spPr>
           <a:xfrm>
-            <a:off x="457200" y="6035040"/>
-            <a:ext cx="10972800" cy="548640"/>
+            <a:off x="6400800" y="5212079"/>
+            <a:ext cx="2011680" cy="411480"/>
           </a:xfrm>
           <a:prstGeom prst="rect">
             <a:avLst/>
@@ -6092,6 +6020,78 @@
           </a:bodyPr>
           <a:lstStyle/>
           <a:p>
+            <a:pPr algn="r">
+              <a:defRPr sz="1400" b="1">
+                <a:solidFill>
+                  <a:srgbClr val="1A1A2E"/>
+                </a:solidFill>
+                <a:latin typeface="Calibri"/>
+              </a:defRPr>
+            </a:pPr>
+            <a:r>
+              <a:t>/api/notifications</a:t>
+            </a:r>
+          </a:p>
+        </p:txBody>
+      </p:sp>
+      <p:sp>
+        <p:nvSpPr>
+          <p:cNvPr id="46" name="TextBox 45"/>
+          <p:cNvSpPr txBox="1"/>
+          <p:nvPr/>
+        </p:nvSpPr>
+        <p:spPr>
+          <a:xfrm>
+            <a:off x="8869680" y="5212079"/>
+            <a:ext cx="640080" cy="411480"/>
+          </a:xfrm>
+          <a:prstGeom prst="rect">
+            <a:avLst/>
+          </a:prstGeom>
+          <a:noFill/>
+        </p:spPr>
+        <p:txBody>
+          <a:bodyPr wrap="square">
+            <a:spAutoFit/>
+          </a:bodyPr>
+          <a:lstStyle/>
+          <a:p>
+            <a:pPr algn="l">
+              <a:defRPr sz="1600" b="1">
+                <a:solidFill>
+                  <a:srgbClr val="78909C"/>
+                </a:solidFill>
+                <a:latin typeface="Calibri"/>
+              </a:defRPr>
+            </a:pPr>
+            <a:r>
+              <a:t>2</a:t>
+            </a:r>
+          </a:p>
+        </p:txBody>
+      </p:sp>
+      <p:sp>
+        <p:nvSpPr>
+          <p:cNvPr id="47" name="TextBox 46"/>
+          <p:cNvSpPr txBox="1"/>
+          <p:nvPr/>
+        </p:nvSpPr>
+        <p:spPr>
+          <a:xfrm>
+            <a:off x="457200" y="6217920"/>
+            <a:ext cx="10972800" cy="548640"/>
+          </a:xfrm>
+          <a:prstGeom prst="rect">
+            <a:avLst/>
+          </a:prstGeom>
+          <a:noFill/>
+        </p:spPr>
+        <p:txBody>
+          <a:bodyPr wrap="square">
+            <a:spAutoFit/>
+          </a:bodyPr>
+          <a:lstStyle/>
+          <a:p>
             <a:pPr algn="ctr">
               <a:defRPr sz="1300" b="0">
                 <a:solidFill>
@@ -6102,6 +6102,122 @@
             </a:pPr>
             <a:r>
               <a:t>Auth: Public | Any Authenticated | User | NGO | Admin  •  Content-Type: application/json  •  File uploads: multipart/form-data</a:t>
+            </a:r>
+          </a:p>
+        </p:txBody>
+      </p:sp>
+      <p:sp>
+        <p:nvSpPr>
+          <p:cNvPr id="48" name="Rectangle 47"/>
+          <p:cNvSpPr/>
+          <p:nvPr/>
+        </p:nvSpPr>
+        <p:spPr>
+          <a:xfrm>
+            <a:off x="0" y="6492240"/>
+            <a:ext cx="12191695" cy="9144"/>
+          </a:xfrm>
+          <a:prstGeom prst="rect">
+            <a:avLst/>
+          </a:prstGeom>
+          <a:solidFill>
+            <a:srgbClr val="D9E2EC"/>
+          </a:solidFill>
+          <a:ln>
+            <a:noFill/>
+          </a:ln>
+          <a:effectLst/>
+        </p:spPr>
+        <p:style>
+          <a:lnRef idx="1">
+            <a:schemeClr val="accent1"/>
+          </a:lnRef>
+          <a:fillRef idx="3">
+            <a:schemeClr val="accent1"/>
+          </a:fillRef>
+          <a:effectRef idx="2">
+            <a:schemeClr val="accent1"/>
+          </a:effectRef>
+          <a:fontRef idx="minor">
+            <a:schemeClr val="lt1"/>
+          </a:fontRef>
+        </p:style>
+        <p:txBody>
+          <a:bodyPr rtlCol="0" anchor="ctr"/>
+          <a:lstStyle/>
+          <a:p>
+            <a:pPr algn="ctr"/>
+          </a:p>
+        </p:txBody>
+      </p:sp>
+      <p:sp>
+        <p:nvSpPr>
+          <p:cNvPr id="49" name="TextBox 48"/>
+          <p:cNvSpPr txBox="1"/>
+          <p:nvPr/>
+        </p:nvSpPr>
+        <p:spPr>
+          <a:xfrm>
+            <a:off x="320040" y="6565392"/>
+            <a:ext cx="5943600" cy="228600"/>
+          </a:xfrm>
+          <a:prstGeom prst="rect">
+            <a:avLst/>
+          </a:prstGeom>
+          <a:noFill/>
+        </p:spPr>
+        <p:txBody>
+          <a:bodyPr wrap="square">
+            <a:spAutoFit/>
+          </a:bodyPr>
+          <a:lstStyle/>
+          <a:p>
+            <a:pPr algn="l">
+              <a:defRPr sz="1000" b="0">
+                <a:solidFill>
+                  <a:srgbClr val="555555"/>
+                </a:solidFill>
+                <a:latin typeface="Calibri"/>
+              </a:defRPr>
+            </a:pPr>
+            <a:r>
+              <a:t>NGO-Connect | Architecture, Delivery, and Validation</a:t>
+            </a:r>
+          </a:p>
+        </p:txBody>
+      </p:sp>
+      <p:sp>
+        <p:nvSpPr>
+          <p:cNvPr id="50" name="TextBox 49"/>
+          <p:cNvSpPr txBox="1"/>
+          <p:nvPr/>
+        </p:nvSpPr>
+        <p:spPr>
+          <a:xfrm>
+            <a:off x="9326880" y="6565392"/>
+            <a:ext cx="2468880" cy="228600"/>
+          </a:xfrm>
+          <a:prstGeom prst="rect">
+            <a:avLst/>
+          </a:prstGeom>
+          <a:noFill/>
+        </p:spPr>
+        <p:txBody>
+          <a:bodyPr wrap="square">
+            <a:spAutoFit/>
+          </a:bodyPr>
+          <a:lstStyle/>
+          <a:p>
+            <a:pPr algn="r">
+              <a:defRPr sz="1000" b="0">
+                <a:solidFill>
+                  <a:srgbClr val="555555"/>
+                </a:solidFill>
+                <a:latin typeface="Calibri"/>
+              </a:defRPr>
+            </a:pPr>
+            <a:r>
+              <a:t>Slide 13/25</a:t>
             </a:r>
           </a:p>
         </p:txBody>
@@ -6462,7 +6578,7 @@
               </a:defRPr>
             </a:pPr>
             <a:r>
-              <a:t>AI &amp; Intelligence (6 endpoints)</a:t>
+              <a:t>Innovation Center (44 endpoints)</a:t>
             </a:r>
           </a:p>
           <a:p>
@@ -6478,7 +6594,7 @@
               </a:defRPr>
             </a:pPr>
             <a:r>
-              <a:t>  GET /ai/recommendations — Personalized</a:t>
+              <a:t>  POST /innovation/giving-circles</a:t>
             </a:r>
           </a:p>
           <a:p>
@@ -6494,7 +6610,7 @@
               </a:defRPr>
             </a:pPr>
             <a:r>
-              <a:t>  POST /ai/chat — LLM chatbot + RAG</a:t>
+              <a:t>  POST /innovation/wishlists/items/:id/pledge</a:t>
             </a:r>
           </a:p>
           <a:p>
@@ -6510,7 +6626,7 @@
               </a:defRPr>
             </a:pPr>
             <a:r>
-              <a:t>  POST /ai/classify-campaign — Auto-classify</a:t>
+              <a:t>  POST /innovation/volunteer/shifts</a:t>
             </a:r>
           </a:p>
           <a:p>
@@ -6526,7 +6642,7 @@
               </a:defRPr>
             </a:pPr>
             <a:r>
-              <a:t>  POST /ai/fraud-score — Risk scoring</a:t>
+              <a:t>  GET /innovation/crm/donors</a:t>
             </a:r>
           </a:p>
           <a:p>
@@ -6555,7 +6671,7 @@
               </a:defRPr>
             </a:pPr>
             <a:r>
-              <a:t>Admin Dashboard (18 endpoints)</a:t>
+              <a:t>Admin Dashboard (25 endpoints)</a:t>
             </a:r>
           </a:p>
           <a:p>
@@ -6587,7 +6703,7 @@
               </a:defRPr>
             </a:pPr>
             <a:r>
-              <a:t>  GET /admin/dashboard/ssr — Full HTML render</a:t>
+              <a:t>  GET /admin/webhooks — Delivery logs</a:t>
             </a:r>
           </a:p>
           <a:p>
@@ -6604,6 +6720,122 @@
             </a:pPr>
             <a:r>
               <a:t>  GET /admin/analytics — Charts data</a:t>
+            </a:r>
+          </a:p>
+        </p:txBody>
+      </p:sp>
+      <p:sp>
+        <p:nvSpPr>
+          <p:cNvPr id="7" name="Rectangle 6"/>
+          <p:cNvSpPr/>
+          <p:nvPr/>
+        </p:nvSpPr>
+        <p:spPr>
+          <a:xfrm>
+            <a:off x="0" y="6492240"/>
+            <a:ext cx="12191695" cy="9144"/>
+          </a:xfrm>
+          <a:prstGeom prst="rect">
+            <a:avLst/>
+          </a:prstGeom>
+          <a:solidFill>
+            <a:srgbClr val="D9E2EC"/>
+          </a:solidFill>
+          <a:ln>
+            <a:noFill/>
+          </a:ln>
+          <a:effectLst/>
+        </p:spPr>
+        <p:style>
+          <a:lnRef idx="1">
+            <a:schemeClr val="accent1"/>
+          </a:lnRef>
+          <a:fillRef idx="3">
+            <a:schemeClr val="accent1"/>
+          </a:fillRef>
+          <a:effectRef idx="2">
+            <a:schemeClr val="accent1"/>
+          </a:effectRef>
+          <a:fontRef idx="minor">
+            <a:schemeClr val="lt1"/>
+          </a:fontRef>
+        </p:style>
+        <p:txBody>
+          <a:bodyPr rtlCol="0" anchor="ctr"/>
+          <a:lstStyle/>
+          <a:p>
+            <a:pPr algn="ctr"/>
+          </a:p>
+        </p:txBody>
+      </p:sp>
+      <p:sp>
+        <p:nvSpPr>
+          <p:cNvPr id="8" name="TextBox 7"/>
+          <p:cNvSpPr txBox="1"/>
+          <p:nvPr/>
+        </p:nvSpPr>
+        <p:spPr>
+          <a:xfrm>
+            <a:off x="320040" y="6565392"/>
+            <a:ext cx="5943600" cy="228600"/>
+          </a:xfrm>
+          <a:prstGeom prst="rect">
+            <a:avLst/>
+          </a:prstGeom>
+          <a:noFill/>
+        </p:spPr>
+        <p:txBody>
+          <a:bodyPr wrap="square">
+            <a:spAutoFit/>
+          </a:bodyPr>
+          <a:lstStyle/>
+          <a:p>
+            <a:pPr algn="l">
+              <a:defRPr sz="1000" b="0">
+                <a:solidFill>
+                  <a:srgbClr val="555555"/>
+                </a:solidFill>
+                <a:latin typeface="Calibri"/>
+              </a:defRPr>
+            </a:pPr>
+            <a:r>
+              <a:t>NGO-Connect | Architecture, Delivery, and Validation</a:t>
+            </a:r>
+          </a:p>
+        </p:txBody>
+      </p:sp>
+      <p:sp>
+        <p:nvSpPr>
+          <p:cNvPr id="9" name="TextBox 8"/>
+          <p:cNvSpPr txBox="1"/>
+          <p:nvPr/>
+        </p:nvSpPr>
+        <p:spPr>
+          <a:xfrm>
+            <a:off x="9326880" y="6565392"/>
+            <a:ext cx="2468880" cy="228600"/>
+          </a:xfrm>
+          <a:prstGeom prst="rect">
+            <a:avLst/>
+          </a:prstGeom>
+          <a:noFill/>
+        </p:spPr>
+        <p:txBody>
+          <a:bodyPr wrap="square">
+            <a:spAutoFit/>
+          </a:bodyPr>
+          <a:lstStyle/>
+          <a:p>
+            <a:pPr algn="r">
+              <a:defRPr sz="1000" b="0">
+                <a:solidFill>
+                  <a:srgbClr val="555555"/>
+                </a:solidFill>
+                <a:latin typeface="Calibri"/>
+              </a:defRPr>
+            </a:pPr>
+            <a:r>
+              <a:t>Slide 14/25</a:t>
             </a:r>
           </a:p>
         </p:txBody>
@@ -7835,6 +8067,122 @@
           </a:p>
         </p:txBody>
       </p:sp>
+      <p:sp>
+        <p:nvSpPr>
+          <p:cNvPr id="25" name="Rectangle 24"/>
+          <p:cNvSpPr/>
+          <p:nvPr/>
+        </p:nvSpPr>
+        <p:spPr>
+          <a:xfrm>
+            <a:off x="0" y="6492240"/>
+            <a:ext cx="12191695" cy="9144"/>
+          </a:xfrm>
+          <a:prstGeom prst="rect">
+            <a:avLst/>
+          </a:prstGeom>
+          <a:solidFill>
+            <a:srgbClr val="D9E2EC"/>
+          </a:solidFill>
+          <a:ln>
+            <a:noFill/>
+          </a:ln>
+          <a:effectLst/>
+        </p:spPr>
+        <p:style>
+          <a:lnRef idx="1">
+            <a:schemeClr val="accent1"/>
+          </a:lnRef>
+          <a:fillRef idx="3">
+            <a:schemeClr val="accent1"/>
+          </a:fillRef>
+          <a:effectRef idx="2">
+            <a:schemeClr val="accent1"/>
+          </a:effectRef>
+          <a:fontRef idx="minor">
+            <a:schemeClr val="lt1"/>
+          </a:fontRef>
+        </p:style>
+        <p:txBody>
+          <a:bodyPr rtlCol="0" anchor="ctr"/>
+          <a:lstStyle/>
+          <a:p>
+            <a:pPr algn="ctr"/>
+          </a:p>
+        </p:txBody>
+      </p:sp>
+      <p:sp>
+        <p:nvSpPr>
+          <p:cNvPr id="26" name="TextBox 25"/>
+          <p:cNvSpPr txBox="1"/>
+          <p:nvPr/>
+        </p:nvSpPr>
+        <p:spPr>
+          <a:xfrm>
+            <a:off x="320040" y="6565392"/>
+            <a:ext cx="5943600" cy="228600"/>
+          </a:xfrm>
+          <a:prstGeom prst="rect">
+            <a:avLst/>
+          </a:prstGeom>
+          <a:noFill/>
+        </p:spPr>
+        <p:txBody>
+          <a:bodyPr wrap="square">
+            <a:spAutoFit/>
+          </a:bodyPr>
+          <a:lstStyle/>
+          <a:p>
+            <a:pPr algn="l">
+              <a:defRPr sz="1000" b="0">
+                <a:solidFill>
+                  <a:srgbClr val="555555"/>
+                </a:solidFill>
+                <a:latin typeface="Calibri"/>
+              </a:defRPr>
+            </a:pPr>
+            <a:r>
+              <a:t>NGO-Connect | Architecture, Delivery, and Validation</a:t>
+            </a:r>
+          </a:p>
+        </p:txBody>
+      </p:sp>
+      <p:sp>
+        <p:nvSpPr>
+          <p:cNvPr id="27" name="TextBox 26"/>
+          <p:cNvSpPr txBox="1"/>
+          <p:nvPr/>
+        </p:nvSpPr>
+        <p:spPr>
+          <a:xfrm>
+            <a:off x="9326880" y="6565392"/>
+            <a:ext cx="2468880" cy="228600"/>
+          </a:xfrm>
+          <a:prstGeom prst="rect">
+            <a:avLst/>
+          </a:prstGeom>
+          <a:noFill/>
+        </p:spPr>
+        <p:txBody>
+          <a:bodyPr wrap="square">
+            <a:spAutoFit/>
+          </a:bodyPr>
+          <a:lstStyle/>
+          <a:p>
+            <a:pPr algn="r">
+              <a:defRPr sz="1000" b="0">
+                <a:solidFill>
+                  <a:srgbClr val="555555"/>
+                </a:solidFill>
+                <a:latin typeface="Calibri"/>
+              </a:defRPr>
+            </a:pPr>
+            <a:r>
+              <a:t>Slide 16/25</a:t>
+            </a:r>
+          </a:p>
+        </p:txBody>
+      </p:sp>
     </p:spTree>
   </p:cSld>
   <p:clrMapOvr>
@@ -8406,7 +8754,7 @@
               </a:defRPr>
             </a:pPr>
             <a:r>
-              <a:t>Google Gemini (gemini-2.5-flash)</a:t>
+              <a:t>Google Gemini</a:t>
             </a:r>
             <a:br/>
             <a:r>
@@ -8675,6 +9023,122 @@
             <a:br/>
             <a:r>
               <a:t>unrealistic goals. Flags if score ≥ 50.</a:t>
+            </a:r>
+          </a:p>
+        </p:txBody>
+      </p:sp>
+      <p:sp>
+        <p:nvSpPr>
+          <p:cNvPr id="17" name="Rectangle 16"/>
+          <p:cNvSpPr/>
+          <p:nvPr/>
+        </p:nvSpPr>
+        <p:spPr>
+          <a:xfrm>
+            <a:off x="0" y="6492240"/>
+            <a:ext cx="12191695" cy="9144"/>
+          </a:xfrm>
+          <a:prstGeom prst="rect">
+            <a:avLst/>
+          </a:prstGeom>
+          <a:solidFill>
+            <a:srgbClr val="D9E2EC"/>
+          </a:solidFill>
+          <a:ln>
+            <a:noFill/>
+          </a:ln>
+          <a:effectLst/>
+        </p:spPr>
+        <p:style>
+          <a:lnRef idx="1">
+            <a:schemeClr val="accent1"/>
+          </a:lnRef>
+          <a:fillRef idx="3">
+            <a:schemeClr val="accent1"/>
+          </a:fillRef>
+          <a:effectRef idx="2">
+            <a:schemeClr val="accent1"/>
+          </a:effectRef>
+          <a:fontRef idx="minor">
+            <a:schemeClr val="lt1"/>
+          </a:fontRef>
+        </p:style>
+        <p:txBody>
+          <a:bodyPr rtlCol="0" anchor="ctr"/>
+          <a:lstStyle/>
+          <a:p>
+            <a:pPr algn="ctr"/>
+          </a:p>
+        </p:txBody>
+      </p:sp>
+      <p:sp>
+        <p:nvSpPr>
+          <p:cNvPr id="18" name="TextBox 17"/>
+          <p:cNvSpPr txBox="1"/>
+          <p:nvPr/>
+        </p:nvSpPr>
+        <p:spPr>
+          <a:xfrm>
+            <a:off x="320040" y="6565392"/>
+            <a:ext cx="5943600" cy="228600"/>
+          </a:xfrm>
+          <a:prstGeom prst="rect">
+            <a:avLst/>
+          </a:prstGeom>
+          <a:noFill/>
+        </p:spPr>
+        <p:txBody>
+          <a:bodyPr wrap="square">
+            <a:spAutoFit/>
+          </a:bodyPr>
+          <a:lstStyle/>
+          <a:p>
+            <a:pPr algn="l">
+              <a:defRPr sz="1000" b="0">
+                <a:solidFill>
+                  <a:srgbClr val="555555"/>
+                </a:solidFill>
+                <a:latin typeface="Calibri"/>
+              </a:defRPr>
+            </a:pPr>
+            <a:r>
+              <a:t>NGO-Connect | Architecture, Delivery, and Validation</a:t>
+            </a:r>
+          </a:p>
+        </p:txBody>
+      </p:sp>
+      <p:sp>
+        <p:nvSpPr>
+          <p:cNvPr id="19" name="TextBox 18"/>
+          <p:cNvSpPr txBox="1"/>
+          <p:nvPr/>
+        </p:nvSpPr>
+        <p:spPr>
+          <a:xfrm>
+            <a:off x="9326880" y="6565392"/>
+            <a:ext cx="2468880" cy="228600"/>
+          </a:xfrm>
+          <a:prstGeom prst="rect">
+            <a:avLst/>
+          </a:prstGeom>
+          <a:noFill/>
+        </p:spPr>
+        <p:txBody>
+          <a:bodyPr wrap="square">
+            <a:spAutoFit/>
+          </a:bodyPr>
+          <a:lstStyle/>
+          <a:p>
+            <a:pPr algn="r">
+              <a:defRPr sz="1000" b="0">
+                <a:solidFill>
+                  <a:srgbClr val="555555"/>
+                </a:solidFill>
+                <a:latin typeface="Calibri"/>
+              </a:defRPr>
+            </a:pPr>
+            <a:r>
+              <a:t>Slide 18/25</a:t>
             </a:r>
           </a:p>
         </p:txBody>
@@ -8816,7 +9280,7 @@
               </a:defRPr>
             </a:pPr>
             <a:r>
-              <a:t>Frontend Application</a:t>
+              <a:t>Validation &amp; Delivery Confidence</a:t>
             </a:r>
           </a:p>
         </p:txBody>
@@ -8852,7 +9316,7 @@
               </a:defRPr>
             </a:pPr>
             <a:r>
-              <a:t>React 18 SPA with 28+ Pages &amp; Role-Based Routing</a:t>
+              <a:t>Automated scenario coverage, moderation checks, and evidence artifacts</a:t>
             </a:r>
           </a:p>
         </p:txBody>
@@ -9113,7 +9577,7 @@
               </a:defRPr>
             </a:pPr>
             <a:r>
-              <a:t>6.  REST API Surface (89 Endpoints)</a:t>
+              <a:t>6.  REST API Surface (149 Endpoints)</a:t>
             </a:r>
           </a:p>
           <a:p>
@@ -9161,7 +9625,7 @@
               </a:defRPr>
             </a:pPr>
             <a:r>
-              <a:t>9.  Frontend Application Structure</a:t>
+              <a:t>9.  Validation Evidence &amp; Quality Metrics</a:t>
             </a:r>
           </a:p>
           <a:p>
@@ -9177,7 +9641,139 @@
               </a:defRPr>
             </a:pPr>
             <a:r>
-              <a:t>10. Deployment &amp; Configuration</a:t>
+              <a:t>10. Frontend Application Structure</a:t>
+            </a:r>
+          </a:p>
+          <a:p>
+            <a:pPr>
+              <a:spcAft>
+                <a:spcPts val="1000"/>
+              </a:spcAft>
+              <a:defRPr sz="2000">
+                <a:solidFill>
+                  <a:srgbClr val="1A1A2E"/>
+                </a:solidFill>
+                <a:latin typeface="Calibri"/>
+              </a:defRPr>
+            </a:pPr>
+            <a:r>
+              <a:t>11. Deployment &amp; Configuration</a:t>
+            </a:r>
+          </a:p>
+        </p:txBody>
+      </p:sp>
+      <p:sp>
+        <p:nvSpPr>
+          <p:cNvPr id="6" name="Rectangle 5"/>
+          <p:cNvSpPr/>
+          <p:nvPr/>
+        </p:nvSpPr>
+        <p:spPr>
+          <a:xfrm>
+            <a:off x="0" y="6492240"/>
+            <a:ext cx="12191695" cy="9144"/>
+          </a:xfrm>
+          <a:prstGeom prst="rect">
+            <a:avLst/>
+          </a:prstGeom>
+          <a:solidFill>
+            <a:srgbClr val="D9E2EC"/>
+          </a:solidFill>
+          <a:ln>
+            <a:noFill/>
+          </a:ln>
+          <a:effectLst/>
+        </p:spPr>
+        <p:style>
+          <a:lnRef idx="1">
+            <a:schemeClr val="accent1"/>
+          </a:lnRef>
+          <a:fillRef idx="3">
+            <a:schemeClr val="accent1"/>
+          </a:fillRef>
+          <a:effectRef idx="2">
+            <a:schemeClr val="accent1"/>
+          </a:effectRef>
+          <a:fontRef idx="minor">
+            <a:schemeClr val="lt1"/>
+          </a:fontRef>
+        </p:style>
+        <p:txBody>
+          <a:bodyPr rtlCol="0" anchor="ctr"/>
+          <a:lstStyle/>
+          <a:p>
+            <a:pPr algn="ctr"/>
+          </a:p>
+        </p:txBody>
+      </p:sp>
+      <p:sp>
+        <p:nvSpPr>
+          <p:cNvPr id="7" name="TextBox 6"/>
+          <p:cNvSpPr txBox="1"/>
+          <p:nvPr/>
+        </p:nvSpPr>
+        <p:spPr>
+          <a:xfrm>
+            <a:off x="320040" y="6565392"/>
+            <a:ext cx="5943600" cy="228600"/>
+          </a:xfrm>
+          <a:prstGeom prst="rect">
+            <a:avLst/>
+          </a:prstGeom>
+          <a:noFill/>
+        </p:spPr>
+        <p:txBody>
+          <a:bodyPr wrap="square">
+            <a:spAutoFit/>
+          </a:bodyPr>
+          <a:lstStyle/>
+          <a:p>
+            <a:pPr algn="l">
+              <a:defRPr sz="1000" b="0">
+                <a:solidFill>
+                  <a:srgbClr val="555555"/>
+                </a:solidFill>
+                <a:latin typeface="Calibri"/>
+              </a:defRPr>
+            </a:pPr>
+            <a:r>
+              <a:t>NGO-Connect | Architecture, Delivery, and Validation</a:t>
+            </a:r>
+          </a:p>
+        </p:txBody>
+      </p:sp>
+      <p:sp>
+        <p:nvSpPr>
+          <p:cNvPr id="8" name="TextBox 7"/>
+          <p:cNvSpPr txBox="1"/>
+          <p:nvPr/>
+        </p:nvSpPr>
+        <p:spPr>
+          <a:xfrm>
+            <a:off x="9326880" y="6565392"/>
+            <a:ext cx="2468880" cy="228600"/>
+          </a:xfrm>
+          <a:prstGeom prst="rect">
+            <a:avLst/>
+          </a:prstGeom>
+          <a:noFill/>
+        </p:spPr>
+        <p:txBody>
+          <a:bodyPr wrap="square">
+            <a:spAutoFit/>
+          </a:bodyPr>
+          <a:lstStyle/>
+          <a:p>
+            <a:pPr algn="r">
+              <a:defRPr sz="1000" b="0">
+                <a:solidFill>
+                  <a:srgbClr val="555555"/>
+                </a:solidFill>
+                <a:latin typeface="Calibri"/>
+              </a:defRPr>
+            </a:pPr>
+            <a:r>
+              <a:t>Slide 2/25</a:t>
             </a:r>
           </a:p>
         </p:txBody>
@@ -9319,65 +9915,29 @@
               </a:defRPr>
             </a:pPr>
             <a:r>
-              <a:t>Frontend Page Architecture</a:t>
-            </a:r>
-          </a:p>
-        </p:txBody>
-      </p:sp>
-      <p:sp>
-        <p:nvSpPr>
-          <p:cNvPr id="5" name="TextBox 4"/>
-          <p:cNvSpPr txBox="1"/>
-          <p:nvPr/>
-        </p:nvSpPr>
-        <p:spPr>
-          <a:xfrm>
-            <a:off x="365760" y="1371600"/>
-            <a:ext cx="3566160" cy="457200"/>
-          </a:xfrm>
-          <a:prstGeom prst="rect">
-            <a:avLst/>
-          </a:prstGeom>
-          <a:noFill/>
-        </p:spPr>
-        <p:txBody>
-          <a:bodyPr wrap="square">
-            <a:spAutoFit/>
-          </a:bodyPr>
-          <a:lstStyle/>
-          <a:p>
-            <a:pPr algn="l">
-              <a:defRPr sz="2000" b="1">
-                <a:solidFill>
-                  <a:srgbClr val="1E88E5"/>
-                </a:solidFill>
-                <a:latin typeface="Calibri"/>
-              </a:defRPr>
-            </a:pPr>
-            <a:r>
-              <a:t>Public (8)</a:t>
-            </a:r>
-          </a:p>
-        </p:txBody>
-      </p:sp>
-      <p:sp>
-        <p:nvSpPr>
-          <p:cNvPr id="6" name="Rounded Rectangle 5"/>
+              <a:t>Validation Scorecard</a:t>
+            </a:r>
+          </a:p>
+        </p:txBody>
+      </p:sp>
+      <p:sp>
+        <p:nvSpPr>
+          <p:cNvPr id="5" name="Rounded Rectangle 4"/>
           <p:cNvSpPr/>
           <p:nvPr/>
         </p:nvSpPr>
         <p:spPr>
           <a:xfrm>
-            <a:off x="365760" y="1920240"/>
-            <a:ext cx="3566160" cy="4114800"/>
+            <a:off x="731520" y="1554480"/>
+            <a:ext cx="2651760" cy="1554480"/>
           </a:xfrm>
           <a:prstGeom prst="roundRect">
             <a:avLst/>
           </a:prstGeom>
           <a:solidFill>
-            <a:srgbClr val="F0F4F8"/>
+            <a:srgbClr val="FFFFFF"/>
           </a:solidFill>
-          <a:ln w="19050">
+          <a:ln w="25400">
             <a:solidFill>
               <a:srgbClr val="1E88E5"/>
             </a:solidFill>
@@ -9399,170 +9959,58 @@
           </a:fontRef>
         </p:style>
         <p:txBody>
-          <a:bodyPr rtlCol="0" anchor="ctr"/>
-          <a:lstStyle/>
-          <a:p>
-            <a:pPr algn="ctr"/>
-          </a:p>
-        </p:txBody>
-      </p:sp>
-      <p:sp>
-        <p:nvSpPr>
-          <p:cNvPr id="7" name="TextBox 6"/>
-          <p:cNvSpPr txBox="1"/>
-          <p:nvPr/>
-        </p:nvSpPr>
-        <p:spPr>
-          <a:xfrm>
-            <a:off x="548640" y="2103120"/>
-            <a:ext cx="3200400" cy="3657600"/>
-          </a:xfrm>
-          <a:prstGeom prst="rect">
-            <a:avLst/>
-          </a:prstGeom>
-          <a:noFill/>
-        </p:spPr>
-        <p:txBody>
-          <a:bodyPr wrap="square">
-            <a:spAutoFit/>
-          </a:bodyPr>
-          <a:lstStyle/>
-          <a:p>
-            <a:pPr>
-              <a:spcAft>
-                <a:spcPts val="800"/>
-              </a:spcAft>
-              <a:defRPr sz="1200">
-                <a:solidFill>
-                  <a:srgbClr val="1A1A2E"/>
-                </a:solidFill>
-                <a:latin typeface="Calibri"/>
-              </a:defRPr>
-            </a:pPr>
-            <a:r>
-              <a:t>Home — Landing with hero CTA, helplines, categories</a:t>
-            </a:r>
-          </a:p>
-          <a:p>
-            <a:pPr>
-              <a:spcAft>
-                <a:spcPts val="800"/>
-              </a:spcAft>
-              <a:defRPr sz="1200">
-                <a:solidFill>
-                  <a:srgbClr val="1A1A2E"/>
-                </a:solidFill>
-                <a:latin typeface="Calibri"/>
-              </a:defRPr>
-            </a:pPr>
-            <a:r>
-              <a:t>Login / Register — Dual-mode (user + NGO)</a:t>
-            </a:r>
-          </a:p>
-          <a:p>
-            <a:pPr>
-              <a:spcAft>
-                <a:spcPts val="800"/>
-              </a:spcAft>
-              <a:defRPr sz="1200">
-                <a:solidFill>
-                  <a:srgbClr val="1A1A2E"/>
-                </a:solidFill>
-                <a:latin typeface="Calibri"/>
-              </a:defRPr>
-            </a:pPr>
-            <a:r>
-              <a:t>NGO List &amp; Profile — Search, filter, tabs, charts</a:t>
-            </a:r>
-          </a:p>
-          <a:p>
-            <a:pPr>
-              <a:spcAft>
-                <a:spcPts val="800"/>
-              </a:spcAft>
-              <a:defRPr sz="1200">
-                <a:solidFill>
-                  <a:srgbClr val="1A1A2E"/>
-                </a:solidFill>
-                <a:latin typeface="Calibri"/>
-              </a:defRPr>
-            </a:pPr>
-            <a:r>
-              <a:t>Campaign List &amp; Details — Donation + volunteer flows</a:t>
-            </a:r>
-          </a:p>
-          <a:p>
-            <a:pPr>
-              <a:spcAft>
-                <a:spcPts val="800"/>
-              </a:spcAft>
-              <a:defRPr sz="1200">
-                <a:solidFill>
-                  <a:srgbClr val="1A1A2E"/>
-                </a:solidFill>
-                <a:latin typeface="Calibri"/>
-              </a:defRPr>
-            </a:pPr>
-            <a:r>
-              <a:t>Chatbot — AI support with suggested questions</a:t>
-            </a:r>
-          </a:p>
-        </p:txBody>
-      </p:sp>
-      <p:sp>
-        <p:nvSpPr>
-          <p:cNvPr id="8" name="TextBox 7"/>
-          <p:cNvSpPr txBox="1"/>
-          <p:nvPr/>
-        </p:nvSpPr>
-        <p:spPr>
-          <a:xfrm>
-            <a:off x="4206240" y="1371600"/>
-            <a:ext cx="3566160" cy="457200"/>
-          </a:xfrm>
-          <a:prstGeom prst="rect">
-            <a:avLst/>
-          </a:prstGeom>
-          <a:noFill/>
-        </p:spPr>
-        <p:txBody>
-          <a:bodyPr wrap="square">
-            <a:spAutoFit/>
-          </a:bodyPr>
-          <a:lstStyle/>
-          <a:p>
-            <a:pPr algn="l">
-              <a:defRPr sz="2000" b="1">
-                <a:solidFill>
-                  <a:srgbClr val="009688"/>
-                </a:solidFill>
-                <a:latin typeface="Calibri"/>
-              </a:defRPr>
-            </a:pPr>
-            <a:r>
-              <a:t>User (7)</a:t>
-            </a:r>
-          </a:p>
-        </p:txBody>
-      </p:sp>
-      <p:sp>
-        <p:nvSpPr>
-          <p:cNvPr id="9" name="Rounded Rectangle 8"/>
+          <a:bodyPr rtlCol="0" anchor="ctr" wrap="square"/>
+          <a:lstStyle/>
+          <a:p>
+            <a:pPr algn="ctr">
+              <a:defRPr sz="3600" b="1">
+                <a:solidFill>
+                  <a:srgbClr val="1E88E5"/>
+                </a:solidFill>
+                <a:latin typeface="Calibri"/>
+              </a:defRPr>
+            </a:pPr>
+            <a:r>
+              <a:t>35</a:t>
+            </a:r>
+          </a:p>
+          <a:p>
+            <a:pPr algn="ctr">
+              <a:defRPr sz="1400">
+                <a:solidFill>
+                  <a:srgbClr val="555555"/>
+                </a:solidFill>
+                <a:latin typeface="Calibri"/>
+              </a:defRPr>
+            </a:pPr>
+            <a:r>
+              <a:t>Smoke Test</a:t>
+            </a:r>
+            <a:br/>
+            <a:r>
+              <a:t>Steps</a:t>
+            </a:r>
+          </a:p>
+        </p:txBody>
+      </p:sp>
+      <p:sp>
+        <p:nvSpPr>
+          <p:cNvPr id="6" name="Rounded Rectangle 5"/>
           <p:cNvSpPr/>
           <p:nvPr/>
         </p:nvSpPr>
         <p:spPr>
           <a:xfrm>
-            <a:off x="4206240" y="1920240"/>
-            <a:ext cx="3566160" cy="4114800"/>
+            <a:off x="3611880" y="1554480"/>
+            <a:ext cx="2651760" cy="1554480"/>
           </a:xfrm>
           <a:prstGeom prst="roundRect">
             <a:avLst/>
           </a:prstGeom>
           <a:solidFill>
-            <a:srgbClr val="F0F4F8"/>
+            <a:srgbClr val="FFFFFF"/>
           </a:solidFill>
-          <a:ln w="19050">
+          <a:ln w="25400">
             <a:solidFill>
               <a:srgbClr val="009688"/>
             </a:solidFill>
@@ -9584,170 +10032,58 @@
           </a:fontRef>
         </p:style>
         <p:txBody>
-          <a:bodyPr rtlCol="0" anchor="ctr"/>
-          <a:lstStyle/>
-          <a:p>
-            <a:pPr algn="ctr"/>
-          </a:p>
-        </p:txBody>
-      </p:sp>
-      <p:sp>
-        <p:nvSpPr>
-          <p:cNvPr id="10" name="TextBox 9"/>
-          <p:cNvSpPr txBox="1"/>
-          <p:nvPr/>
-        </p:nvSpPr>
-        <p:spPr>
-          <a:xfrm>
-            <a:off x="4389120" y="2103120"/>
-            <a:ext cx="3200400" cy="3657600"/>
-          </a:xfrm>
-          <a:prstGeom prst="rect">
-            <a:avLst/>
-          </a:prstGeom>
-          <a:noFill/>
-        </p:spPr>
-        <p:txBody>
-          <a:bodyPr wrap="square">
-            <a:spAutoFit/>
-          </a:bodyPr>
-          <a:lstStyle/>
-          <a:p>
-            <a:pPr>
-              <a:spcAft>
-                <a:spcPts val="800"/>
-              </a:spcAft>
-              <a:defRPr sz="1200">
-                <a:solidFill>
-                  <a:srgbClr val="1A1A2E"/>
-                </a:solidFill>
-                <a:latin typeface="Calibri"/>
-              </a:defRPr>
-            </a:pPr>
-            <a:r>
-              <a:t>Dashboard — Help requests, donations, volunteers, certs</a:t>
-            </a:r>
-          </a:p>
-          <a:p>
-            <a:pPr>
-              <a:spcAft>
-                <a:spcPts val="800"/>
-              </a:spcAft>
-              <a:defRPr sz="1200">
-                <a:solidFill>
-                  <a:srgbClr val="1A1A2E"/>
-                </a:solidFill>
-                <a:latin typeface="Calibri"/>
-              </a:defRPr>
-            </a:pPr>
-            <a:r>
-              <a:t>Donate — Campaign selection, payment, receipts</a:t>
-            </a:r>
-          </a:p>
-          <a:p>
-            <a:pPr>
-              <a:spcAft>
-                <a:spcPts val="800"/>
-              </a:spcAft>
-              <a:defRPr sz="1200">
-                <a:solidFill>
-                  <a:srgbClr val="1A1A2E"/>
-                </a:solidFill>
-                <a:latin typeface="Calibri"/>
-              </a:defRPr>
-            </a:pPr>
-            <a:r>
-              <a:t>Volunteer Opportunities — Apply, withdraw, complete</a:t>
-            </a:r>
-          </a:p>
-          <a:p>
-            <a:pPr>
-              <a:spcAft>
-                <a:spcPts val="800"/>
-              </a:spcAft>
-              <a:defRPr sz="1200">
-                <a:solidFill>
-                  <a:srgbClr val="1A1A2E"/>
-                </a:solidFill>
-                <a:latin typeface="Calibri"/>
-              </a:defRPr>
-            </a:pPr>
-            <a:r>
-              <a:t>Recommendations — AI-powered with match scores</a:t>
-            </a:r>
-          </a:p>
-          <a:p>
-            <a:pPr>
-              <a:spcAft>
-                <a:spcPts val="800"/>
-              </a:spcAft>
-              <a:defRPr sz="1200">
-                <a:solidFill>
-                  <a:srgbClr val="1A1A2E"/>
-                </a:solidFill>
-                <a:latin typeface="Calibri"/>
-              </a:defRPr>
-            </a:pPr>
-            <a:r>
-              <a:t>Messages / Profile / Map — Communication &amp; navigation</a:t>
-            </a:r>
-          </a:p>
-        </p:txBody>
-      </p:sp>
-      <p:sp>
-        <p:nvSpPr>
-          <p:cNvPr id="11" name="TextBox 10"/>
-          <p:cNvSpPr txBox="1"/>
-          <p:nvPr/>
-        </p:nvSpPr>
-        <p:spPr>
-          <a:xfrm>
-            <a:off x="8046720" y="1371600"/>
-            <a:ext cx="3566160" cy="457200"/>
-          </a:xfrm>
-          <a:prstGeom prst="rect">
-            <a:avLst/>
-          </a:prstGeom>
-          <a:noFill/>
-        </p:spPr>
-        <p:txBody>
-          <a:bodyPr wrap="square">
-            <a:spAutoFit/>
-          </a:bodyPr>
-          <a:lstStyle/>
-          <a:p>
-            <a:pPr algn="l">
-              <a:defRPr sz="2000" b="1">
-                <a:solidFill>
-                  <a:srgbClr val="FF6B35"/>
-                </a:solidFill>
-                <a:latin typeface="Calibri"/>
-              </a:defRPr>
-            </a:pPr>
-            <a:r>
-              <a:t>Admin (7)</a:t>
-            </a:r>
-          </a:p>
-        </p:txBody>
-      </p:sp>
-      <p:sp>
-        <p:nvSpPr>
-          <p:cNvPr id="12" name="Rounded Rectangle 11"/>
+          <a:bodyPr rtlCol="0" anchor="ctr" wrap="square"/>
+          <a:lstStyle/>
+          <a:p>
+            <a:pPr algn="ctr">
+              <a:defRPr sz="3600" b="1">
+                <a:solidFill>
+                  <a:srgbClr val="009688"/>
+                </a:solidFill>
+                <a:latin typeface="Calibri"/>
+              </a:defRPr>
+            </a:pPr>
+            <a:r>
+              <a:t>21.69 ms</a:t>
+            </a:r>
+          </a:p>
+          <a:p>
+            <a:pPr algn="ctr">
+              <a:defRPr sz="1400">
+                <a:solidFill>
+                  <a:srgbClr val="555555"/>
+                </a:solidFill>
+                <a:latin typeface="Calibri"/>
+              </a:defRPr>
+            </a:pPr>
+            <a:r>
+              <a:t>Avg Step</a:t>
+            </a:r>
+            <a:br/>
+            <a:r>
+              <a:t>Latency</a:t>
+            </a:r>
+          </a:p>
+        </p:txBody>
+      </p:sp>
+      <p:sp>
+        <p:nvSpPr>
+          <p:cNvPr id="7" name="Rounded Rectangle 6"/>
           <p:cNvSpPr/>
           <p:nvPr/>
         </p:nvSpPr>
         <p:spPr>
           <a:xfrm>
-            <a:off x="8046720" y="1920240"/>
-            <a:ext cx="3566160" cy="4114800"/>
+            <a:off x="6492240" y="1554480"/>
+            <a:ext cx="2377440" cy="1554480"/>
           </a:xfrm>
           <a:prstGeom prst="roundRect">
             <a:avLst/>
           </a:prstGeom>
           <a:solidFill>
-            <a:srgbClr val="F0F4F8"/>
+            <a:srgbClr val="FFFFFF"/>
           </a:solidFill>
-          <a:ln w="19050">
+          <a:ln w="25400">
             <a:solidFill>
               <a:srgbClr val="FF6B35"/>
             </a:solidFill>
@@ -9769,23 +10105,123 @@
           </a:fontRef>
         </p:style>
         <p:txBody>
-          <a:bodyPr rtlCol="0" anchor="ctr"/>
-          <a:lstStyle/>
-          <a:p>
-            <a:pPr algn="ctr"/>
-          </a:p>
-        </p:txBody>
-      </p:sp>
-      <p:sp>
-        <p:nvSpPr>
-          <p:cNvPr id="13" name="TextBox 12"/>
+          <a:bodyPr rtlCol="0" anchor="ctr" wrap="square"/>
+          <a:lstStyle/>
+          <a:p>
+            <a:pPr algn="ctr">
+              <a:defRPr sz="3600" b="1">
+                <a:solidFill>
+                  <a:srgbClr val="FF6B35"/>
+                </a:solidFill>
+                <a:latin typeface="Calibri"/>
+              </a:defRPr>
+            </a:pPr>
+            <a:r>
+              <a:t>375/375</a:t>
+            </a:r>
+          </a:p>
+          <a:p>
+            <a:pPr algn="ctr">
+              <a:defRPr sz="1400">
+                <a:solidFill>
+                  <a:srgbClr val="555555"/>
+                </a:solidFill>
+                <a:latin typeface="Calibri"/>
+              </a:defRPr>
+            </a:pPr>
+            <a:r>
+              <a:t>Flood Scenario</a:t>
+            </a:r>
+            <a:br/>
+            <a:r>
+              <a:t>Pass</a:t>
+            </a:r>
+          </a:p>
+        </p:txBody>
+      </p:sp>
+      <p:sp>
+        <p:nvSpPr>
+          <p:cNvPr id="8" name="Rounded Rectangle 7"/>
+          <p:cNvSpPr/>
+          <p:nvPr/>
+        </p:nvSpPr>
+        <p:spPr>
+          <a:xfrm>
+            <a:off x="9098280" y="1554480"/>
+            <a:ext cx="2194560" cy="1554480"/>
+          </a:xfrm>
+          <a:prstGeom prst="roundRect">
+            <a:avLst/>
+          </a:prstGeom>
+          <a:solidFill>
+            <a:srgbClr val="FFFFFF"/>
+          </a:solidFill>
+          <a:ln w="25400">
+            <a:solidFill>
+              <a:srgbClr val="43A047"/>
+            </a:solidFill>
+          </a:ln>
+          <a:effectLst/>
+        </p:spPr>
+        <p:style>
+          <a:lnRef idx="1">
+            <a:schemeClr val="accent1"/>
+          </a:lnRef>
+          <a:fillRef idx="3">
+            <a:schemeClr val="accent1"/>
+          </a:fillRef>
+          <a:effectRef idx="2">
+            <a:schemeClr val="accent1"/>
+          </a:effectRef>
+          <a:fontRef idx="minor">
+            <a:schemeClr val="lt1"/>
+          </a:fontRef>
+        </p:style>
+        <p:txBody>
+          <a:bodyPr rtlCol="0" anchor="ctr" wrap="square"/>
+          <a:lstStyle/>
+          <a:p>
+            <a:pPr algn="ctr">
+              <a:defRPr sz="3600" b="1">
+                <a:solidFill>
+                  <a:srgbClr val="43A047"/>
+                </a:solidFill>
+                <a:latin typeface="Calibri"/>
+              </a:defRPr>
+            </a:pPr>
+            <a:r>
+              <a:t>0</a:t>
+            </a:r>
+          </a:p>
+          <a:p>
+            <a:pPr algn="ctr">
+              <a:defRPr sz="1400">
+                <a:solidFill>
+                  <a:srgbClr val="555555"/>
+                </a:solidFill>
+                <a:latin typeface="Calibri"/>
+              </a:defRPr>
+            </a:pPr>
+            <a:r>
+              <a:t>Flood</a:t>
+            </a:r>
+            <a:br/>
+            <a:r>
+              <a:t>Failures</a:t>
+            </a:r>
+          </a:p>
+        </p:txBody>
+      </p:sp>
+      <p:sp>
+        <p:nvSpPr>
+          <p:cNvPr id="9" name="TextBox 8"/>
           <p:cNvSpPr txBox="1"/>
           <p:nvPr/>
         </p:nvSpPr>
         <p:spPr>
           <a:xfrm>
-            <a:off x="8229600" y="2103120"/>
-            <a:ext cx="3200400" cy="3657600"/>
+            <a:off x="731520" y="3474720"/>
+            <a:ext cx="10698480" cy="457200"/>
           </a:xfrm>
           <a:prstGeom prst="rect">
             <a:avLst/>
@@ -9798,97 +10234,30 @@
           </a:bodyPr>
           <a:lstStyle/>
           <a:p>
-            <a:pPr>
-              <a:spcAft>
-                <a:spcPts val="800"/>
-              </a:spcAft>
-              <a:defRPr sz="1200">
-                <a:solidFill>
-                  <a:srgbClr val="1A1A2E"/>
-                </a:solidFill>
-                <a:latin typeface="Calibri"/>
-              </a:defRPr>
-            </a:pPr>
-            <a:r>
-              <a:t>Dashboard — KPI cards, charts, auto-refresh, SSR viewer</a:t>
-            </a:r>
-          </a:p>
-          <a:p>
-            <a:pPr>
-              <a:spcAft>
-                <a:spcPts val="800"/>
-              </a:spcAft>
-              <a:defRPr sz="1200">
-                <a:solidFill>
-                  <a:srgbClr val="1A1A2E"/>
-                </a:solidFill>
-                <a:latin typeface="Calibri"/>
-              </a:defRPr>
-            </a:pPr>
-            <a:r>
-              <a:t>Verifications — NGO approval/rejection queue</a:t>
-            </a:r>
-          </a:p>
-          <a:p>
-            <a:pPr>
-              <a:spcAft>
-                <a:spcPts val="800"/>
-              </a:spcAft>
-              <a:defRPr sz="1200">
-                <a:solidFill>
-                  <a:srgbClr val="1A1A2E"/>
-                </a:solidFill>
-                <a:latin typeface="Calibri"/>
-              </a:defRPr>
-            </a:pPr>
-            <a:r>
-              <a:t>Flagged Content — Moderation &amp; flag request review</a:t>
-            </a:r>
-          </a:p>
-          <a:p>
-            <a:pPr>
-              <a:spcAft>
-                <a:spcPts val="800"/>
-              </a:spcAft>
-              <a:defRPr sz="1200">
-                <a:solidFill>
-                  <a:srgbClr val="1A1A2E"/>
-                </a:solidFill>
-                <a:latin typeface="Calibri"/>
-              </a:defRPr>
-            </a:pPr>
-            <a:r>
-              <a:t>Analytics — Line/bar charts, platform statistics</a:t>
-            </a:r>
-          </a:p>
-          <a:p>
-            <a:pPr>
-              <a:spcAft>
-                <a:spcPts val="800"/>
-              </a:spcAft>
-              <a:defRPr sz="1200">
-                <a:solidFill>
-                  <a:srgbClr val="1A1A2E"/>
-                </a:solidFill>
-                <a:latin typeface="Calibri"/>
-              </a:defRPr>
-            </a:pPr>
-            <a:r>
-              <a:t>Users / Notifications / Categories / Requests</a:t>
-            </a:r>
-          </a:p>
-        </p:txBody>
-      </p:sp>
-      <p:sp>
-        <p:nvSpPr>
-          <p:cNvPr id="14" name="TextBox 13"/>
+            <a:pPr algn="l">
+              <a:defRPr sz="2200" b="1">
+                <a:solidFill>
+                  <a:srgbClr val="0B1D51"/>
+                </a:solidFill>
+                <a:latin typeface="Calibri"/>
+              </a:defRPr>
+            </a:pPr>
+            <a:r>
+              <a:t>Latest High-Volume Role Scenario Coverage</a:t>
+            </a:r>
+          </a:p>
+        </p:txBody>
+      </p:sp>
+      <p:sp>
+        <p:nvSpPr>
+          <p:cNvPr id="10" name="TextBox 9"/>
           <p:cNvSpPr txBox="1"/>
           <p:nvPr/>
         </p:nvSpPr>
         <p:spPr>
           <a:xfrm>
-            <a:off x="457200" y="6309360"/>
-            <a:ext cx="10972800" cy="457200"/>
+            <a:off x="822960" y="3977639"/>
+            <a:ext cx="10607040" cy="2011680"/>
           </a:xfrm>
           <a:prstGeom prst="rect">
             <a:avLst/>
@@ -9901,8 +10270,139 @@
           </a:bodyPr>
           <a:lstStyle/>
           <a:p>
-            <a:pPr algn="ctr">
-              <a:defRPr sz="1300" b="0">
+            <a:pPr>
+              <a:spcAft>
+                <a:spcPts val="700"/>
+              </a:spcAft>
+              <a:defRPr sz="1500">
+                <a:solidFill>
+                  <a:srgbClr val="1A1A2E"/>
+                </a:solidFill>
+                <a:latin typeface="Calibri"/>
+              </a:defRPr>
+            </a:pPr>
+            <a:r>
+              <a:t>Flood scenario: 10 users, 4 NGOs, 9 campaigns, 10 donations, 3 endorsements</a:t>
+            </a:r>
+          </a:p>
+          <a:p>
+            <a:pPr>
+              <a:spcAft>
+                <a:spcPts val="700"/>
+              </a:spcAft>
+              <a:defRPr sz="1500">
+                <a:solidFill>
+                  <a:srgbClr val="1A1A2E"/>
+                </a:solidFill>
+                <a:latin typeface="Calibri"/>
+              </a:defRPr>
+            </a:pPr>
+            <a:r>
+              <a:t>Role moderation scenario: verified NGOs = 2, rejected NGOs = 1</a:t>
+            </a:r>
+          </a:p>
+          <a:p>
+            <a:pPr>
+              <a:spcAft>
+                <a:spcPts val="700"/>
+              </a:spcAft>
+              <a:defRPr sz="1500">
+                <a:solidFill>
+                  <a:srgbClr val="1A1A2E"/>
+                </a:solidFill>
+                <a:latin typeface="Calibri"/>
+              </a:defRPr>
+            </a:pPr>
+            <a:r>
+              <a:t>Flag moderation checks: submitted = 3, resolved = 3</a:t>
+            </a:r>
+          </a:p>
+          <a:p>
+            <a:pPr>
+              <a:spcAft>
+                <a:spcPts val="700"/>
+              </a:spcAft>
+              <a:defRPr sz="1500">
+                <a:solidFill>
+                  <a:srgbClr val="1A1A2E"/>
+                </a:solidFill>
+                <a:latin typeface="Calibri"/>
+              </a:defRPr>
+            </a:pPr>
+            <a:r>
+              <a:t>Evidence files: flood_feature_report_20260309120914.json and role_workflow_report_20260309120955.json</a:t>
+            </a:r>
+          </a:p>
+        </p:txBody>
+      </p:sp>
+      <p:sp>
+        <p:nvSpPr>
+          <p:cNvPr id="11" name="Rectangle 10"/>
+          <p:cNvSpPr/>
+          <p:nvPr/>
+        </p:nvSpPr>
+        <p:spPr>
+          <a:xfrm>
+            <a:off x="0" y="6492240"/>
+            <a:ext cx="12191695" cy="9144"/>
+          </a:xfrm>
+          <a:prstGeom prst="rect">
+            <a:avLst/>
+          </a:prstGeom>
+          <a:solidFill>
+            <a:srgbClr val="D9E2EC"/>
+          </a:solidFill>
+          <a:ln>
+            <a:noFill/>
+          </a:ln>
+          <a:effectLst/>
+        </p:spPr>
+        <p:style>
+          <a:lnRef idx="1">
+            <a:schemeClr val="accent1"/>
+          </a:lnRef>
+          <a:fillRef idx="3">
+            <a:schemeClr val="accent1"/>
+          </a:fillRef>
+          <a:effectRef idx="2">
+            <a:schemeClr val="accent1"/>
+          </a:effectRef>
+          <a:fontRef idx="minor">
+            <a:schemeClr val="lt1"/>
+          </a:fontRef>
+        </p:style>
+        <p:txBody>
+          <a:bodyPr rtlCol="0" anchor="ctr"/>
+          <a:lstStyle/>
+          <a:p>
+            <a:pPr algn="ctr"/>
+          </a:p>
+        </p:txBody>
+      </p:sp>
+      <p:sp>
+        <p:nvSpPr>
+          <p:cNvPr id="12" name="TextBox 11"/>
+          <p:cNvSpPr txBox="1"/>
+          <p:nvPr/>
+        </p:nvSpPr>
+        <p:spPr>
+          <a:xfrm>
+            <a:off x="320040" y="6565392"/>
+            <a:ext cx="5943600" cy="228600"/>
+          </a:xfrm>
+          <a:prstGeom prst="rect">
+            <a:avLst/>
+          </a:prstGeom>
+          <a:noFill/>
+        </p:spPr>
+        <p:txBody>
+          <a:bodyPr wrap="square">
+            <a:spAutoFit/>
+          </a:bodyPr>
+          <a:lstStyle/>
+          <a:p>
+            <a:pPr algn="l">
+              <a:defRPr sz="1000" b="0">
                 <a:solidFill>
                   <a:srgbClr val="555555"/>
                 </a:solidFill>
@@ -9910,7 +10410,43 @@
               </a:defRPr>
             </a:pPr>
             <a:r>
-              <a:t>Components: Navbar • ProtectedRoute • UserRoute • AdminRoute • ConfirmModal • PreferencesModal • RecommendedNgos</a:t>
+              <a:t>NGO-Connect | Architecture, Delivery, and Validation</a:t>
+            </a:r>
+          </a:p>
+        </p:txBody>
+      </p:sp>
+      <p:sp>
+        <p:nvSpPr>
+          <p:cNvPr id="13" name="TextBox 12"/>
+          <p:cNvSpPr txBox="1"/>
+          <p:nvPr/>
+        </p:nvSpPr>
+        <p:spPr>
+          <a:xfrm>
+            <a:off x="9326880" y="6565392"/>
+            <a:ext cx="2468880" cy="228600"/>
+          </a:xfrm>
+          <a:prstGeom prst="rect">
+            <a:avLst/>
+          </a:prstGeom>
+          <a:noFill/>
+        </p:spPr>
+        <p:txBody>
+          <a:bodyPr wrap="square">
+            <a:spAutoFit/>
+          </a:bodyPr>
+          <a:lstStyle/>
+          <a:p>
+            <a:pPr algn="r">
+              <a:defRPr sz="1000" b="0">
+                <a:solidFill>
+                  <a:srgbClr val="555555"/>
+                </a:solidFill>
+                <a:latin typeface="Calibri"/>
+              </a:defRPr>
+            </a:pPr>
+            <a:r>
+              <a:t>Slide 20/25</a:t>
             </a:r>
           </a:p>
         </p:txBody>
@@ -10052,7 +10588,7 @@
               </a:defRPr>
             </a:pPr>
             <a:r>
-              <a:t>Deployment &amp; Configuration</a:t>
+              <a:t>Visual Evidence Snapshot</a:t>
             </a:r>
           </a:p>
         </p:txBody>
@@ -10065,8 +10601,8 @@
         </p:nvSpPr>
         <p:spPr>
           <a:xfrm>
-            <a:off x="731520" y="1371600"/>
-            <a:ext cx="5029200" cy="457200"/>
+            <a:off x="731520" y="1143000"/>
+            <a:ext cx="10698480" cy="411480"/>
           </a:xfrm>
           <a:prstGeom prst="rect">
             <a:avLst/>
@@ -10080,29 +10616,169 @@
           <a:lstStyle/>
           <a:p>
             <a:pPr algn="l">
-              <a:defRPr sz="2200" b="1">
-                <a:solidFill>
-                  <a:srgbClr val="009688"/>
-                </a:solidFill>
-                <a:latin typeface="Calibri"/>
-              </a:defRPr>
-            </a:pPr>
-            <a:r>
-              <a:t>Backend Environment</a:t>
-            </a:r>
-          </a:p>
-        </p:txBody>
-      </p:sp>
-      <p:sp>
-        <p:nvSpPr>
-          <p:cNvPr id="6" name="TextBox 5"/>
+              <a:defRPr sz="1400" b="0">
+                <a:solidFill>
+                  <a:srgbClr val="555555"/>
+                </a:solidFill>
+                <a:latin typeface="Calibri"/>
+              </a:defRPr>
+            </a:pPr>
+            <a:r>
+              <a:t>Screens captured during functional validation runs</a:t>
+            </a:r>
+          </a:p>
+        </p:txBody>
+      </p:sp>
+      <p:sp>
+        <p:nvSpPr>
+          <p:cNvPr id="6" name="Rounded Rectangle 5"/>
+          <p:cNvSpPr/>
+          <p:nvPr/>
+        </p:nvSpPr>
+        <p:spPr>
+          <a:xfrm>
+            <a:off x="731520" y="1645920"/>
+            <a:ext cx="5394960" cy="4526280"/>
+          </a:xfrm>
+          <a:prstGeom prst="roundRect">
+            <a:avLst/>
+          </a:prstGeom>
+          <a:solidFill>
+            <a:srgbClr val="F0F4F8"/>
+          </a:solidFill>
+          <a:ln>
+            <a:solidFill>
+              <a:srgbClr val="CFD8E3"/>
+            </a:solidFill>
+          </a:ln>
+          <a:effectLst/>
+        </p:spPr>
+        <p:style>
+          <a:lnRef idx="1">
+            <a:schemeClr val="accent1"/>
+          </a:lnRef>
+          <a:fillRef idx="3">
+            <a:schemeClr val="accent1"/>
+          </a:fillRef>
+          <a:effectRef idx="2">
+            <a:schemeClr val="accent1"/>
+          </a:effectRef>
+          <a:fontRef idx="minor">
+            <a:schemeClr val="lt1"/>
+          </a:fontRef>
+        </p:style>
+        <p:txBody>
+          <a:bodyPr rtlCol="0" anchor="ctr"/>
+          <a:lstStyle/>
+          <a:p>
+            <a:pPr algn="ctr"/>
+          </a:p>
+        </p:txBody>
+      </p:sp>
+      <p:sp>
+        <p:nvSpPr>
+          <p:cNvPr id="7" name="Rounded Rectangle 6"/>
+          <p:cNvSpPr/>
+          <p:nvPr/>
+        </p:nvSpPr>
+        <p:spPr>
+          <a:xfrm>
+            <a:off x="6400800" y="1645920"/>
+            <a:ext cx="5029200" cy="4526280"/>
+          </a:xfrm>
+          <a:prstGeom prst="roundRect">
+            <a:avLst/>
+          </a:prstGeom>
+          <a:solidFill>
+            <a:srgbClr val="F0F4F8"/>
+          </a:solidFill>
+          <a:ln>
+            <a:solidFill>
+              <a:srgbClr val="CFD8E3"/>
+            </a:solidFill>
+          </a:ln>
+          <a:effectLst/>
+        </p:spPr>
+        <p:style>
+          <a:lnRef idx="1">
+            <a:schemeClr val="accent1"/>
+          </a:lnRef>
+          <a:fillRef idx="3">
+            <a:schemeClr val="accent1"/>
+          </a:fillRef>
+          <a:effectRef idx="2">
+            <a:schemeClr val="accent1"/>
+          </a:effectRef>
+          <a:fontRef idx="minor">
+            <a:schemeClr val="lt1"/>
+          </a:fontRef>
+        </p:style>
+        <p:txBody>
+          <a:bodyPr rtlCol="0" anchor="ctr"/>
+          <a:lstStyle/>
+          <a:p>
+            <a:pPr algn="ctr"/>
+          </a:p>
+        </p:txBody>
+      </p:sp>
+      <p:pic>
+        <p:nvPicPr>
+          <p:cNvPr id="8" name="Picture 7" descr="ngo_team_modal_clickable_checks.png"/>
+          <p:cNvPicPr>
+            <a:picLocks noChangeAspect="1"/>
+          </p:cNvPicPr>
+          <p:nvPr/>
+        </p:nvPicPr>
+        <p:blipFill>
+          <a:blip r:embed="rId2"/>
+          <a:stretch>
+            <a:fillRect/>
+          </a:stretch>
+        </p:blipFill>
+        <p:spPr>
+          <a:xfrm>
+            <a:off x="914400" y="1874519"/>
+            <a:ext cx="5029200" cy="3977639"/>
+          </a:xfrm>
+          <a:prstGeom prst="rect">
+            <a:avLst/>
+          </a:prstGeom>
+        </p:spPr>
+      </p:pic>
+      <p:pic>
+        <p:nvPicPr>
+          <p:cNvPr id="9" name="Picture 8" descr="admin_webhooks_after_controls_2026-03-09T11-10-03-075Z.png"/>
+          <p:cNvPicPr>
+            <a:picLocks noChangeAspect="1"/>
+          </p:cNvPicPr>
+          <p:nvPr/>
+        </p:nvPicPr>
+        <p:blipFill>
+          <a:blip r:embed="rId3"/>
+          <a:stretch>
+            <a:fillRect/>
+          </a:stretch>
+        </p:blipFill>
+        <p:spPr>
+          <a:xfrm>
+            <a:off x="6583680" y="1874519"/>
+            <a:ext cx="4663440" cy="3977639"/>
+          </a:xfrm>
+          <a:prstGeom prst="rect">
+            <a:avLst/>
+          </a:prstGeom>
+        </p:spPr>
+      </p:pic>
+      <p:sp>
+        <p:nvSpPr>
+          <p:cNvPr id="10" name="TextBox 9"/>
           <p:cNvSpPr txBox="1"/>
           <p:nvPr/>
         </p:nvSpPr>
         <p:spPr>
           <a:xfrm>
-            <a:off x="914400" y="1920240"/>
-            <a:ext cx="5029200" cy="2743200"/>
+            <a:off x="914400" y="5897880"/>
+            <a:ext cx="5029200" cy="274320"/>
           </a:xfrm>
           <a:prstGeom prst="rect">
             <a:avLst/>
@@ -10115,129 +10791,30 @@
           </a:bodyPr>
           <a:lstStyle/>
           <a:p>
-            <a:pPr>
-              <a:spcAft>
-                <a:spcPts val="500"/>
-              </a:spcAft>
-              <a:defRPr sz="1400">
-                <a:solidFill>
-                  <a:srgbClr val="1A1A2E"/>
-                </a:solidFill>
-                <a:latin typeface="Calibri"/>
-              </a:defRPr>
-            </a:pPr>
-            <a:r>
-              <a:t>PORT = 5001</a:t>
-            </a:r>
-          </a:p>
-          <a:p>
-            <a:pPr>
-              <a:spcAft>
-                <a:spcPts val="500"/>
-              </a:spcAft>
-              <a:defRPr sz="1400">
-                <a:solidFill>
-                  <a:srgbClr val="1A1A2E"/>
-                </a:solidFill>
-                <a:latin typeface="Calibri"/>
-              </a:defRPr>
-            </a:pPr>
-            <a:r>
-              <a:t>POSTGRES_URL = postgresql://...</a:t>
-            </a:r>
-          </a:p>
-          <a:p>
-            <a:pPr>
-              <a:spcAft>
-                <a:spcPts val="500"/>
-              </a:spcAft>
-              <a:defRPr sz="1400">
-                <a:solidFill>
-                  <a:srgbClr val="1A1A2E"/>
-                </a:solidFill>
-                <a:latin typeface="Calibri"/>
-              </a:defRPr>
-            </a:pPr>
-            <a:r>
-              <a:t>JWT_SECRET = &lt;strong-secret&gt;</a:t>
-            </a:r>
-          </a:p>
-          <a:p>
-            <a:pPr>
-              <a:spcAft>
-                <a:spcPts val="500"/>
-              </a:spcAft>
-              <a:defRPr sz="1400">
-                <a:solidFill>
-                  <a:srgbClr val="1A1A2E"/>
-                </a:solidFill>
-                <a:latin typeface="Calibri"/>
-              </a:defRPr>
-            </a:pPr>
-            <a:r>
-              <a:t>GEMINI_API_KEY = &lt;optional&gt;</a:t>
-            </a:r>
-          </a:p>
-          <a:p>
-            <a:pPr>
-              <a:spcAft>
-                <a:spcPts val="500"/>
-              </a:spcAft>
-              <a:defRPr sz="1400">
-                <a:solidFill>
-                  <a:srgbClr val="1A1A2E"/>
-                </a:solidFill>
-                <a:latin typeface="Calibri"/>
-              </a:defRPr>
-            </a:pPr>
-            <a:r>
-              <a:t>PAYMENT_GATEWAY_PROVIDER = mock | razorpay</a:t>
-            </a:r>
-          </a:p>
-          <a:p>
-            <a:pPr>
-              <a:spcAft>
-                <a:spcPts val="500"/>
-              </a:spcAft>
-              <a:defRPr sz="1400">
-                <a:solidFill>
-                  <a:srgbClr val="1A1A2E"/>
-                </a:solidFill>
-                <a:latin typeface="Calibri"/>
-              </a:defRPr>
-            </a:pPr>
-            <a:r>
-              <a:t>RAZORPAY_KEY_ID = &lt;optional&gt;</a:t>
-            </a:r>
-          </a:p>
-          <a:p>
-            <a:pPr>
-              <a:spcAft>
-                <a:spcPts val="500"/>
-              </a:spcAft>
-              <a:defRPr sz="1400">
-                <a:solidFill>
-                  <a:srgbClr val="1A1A2E"/>
-                </a:solidFill>
-                <a:latin typeface="Calibri"/>
-              </a:defRPr>
-            </a:pPr>
-            <a:r>
-              <a:t>RAZORPAY_KEY_SECRET = &lt;optional&gt;</a:t>
-            </a:r>
-          </a:p>
-        </p:txBody>
-      </p:sp>
-      <p:sp>
-        <p:nvSpPr>
-          <p:cNvPr id="7" name="TextBox 6"/>
+            <a:pPr algn="ctr">
+              <a:defRPr sz="1100" b="0">
+                <a:solidFill>
+                  <a:srgbClr val="555555"/>
+                </a:solidFill>
+                <a:latin typeface="Calibri"/>
+              </a:defRPr>
+            </a:pPr>
+            <a:r>
+              <a:t>NGO dashboard interactive team insight checks</a:t>
+            </a:r>
+          </a:p>
+        </p:txBody>
+      </p:sp>
+      <p:sp>
+        <p:nvSpPr>
+          <p:cNvPr id="11" name="TextBox 10"/>
           <p:cNvSpPr txBox="1"/>
           <p:nvPr/>
         </p:nvSpPr>
         <p:spPr>
           <a:xfrm>
-            <a:off x="6400800" y="1371600"/>
-            <a:ext cx="4572000" cy="457200"/>
+            <a:off x="6583680" y="5897880"/>
+            <a:ext cx="4663440" cy="274320"/>
           </a:xfrm>
           <a:prstGeom prst="rect">
             <a:avLst/>
@@ -10250,30 +10827,74 @@
           </a:bodyPr>
           <a:lstStyle/>
           <a:p>
-            <a:pPr algn="l">
-              <a:defRPr sz="2200" b="1">
-                <a:solidFill>
-                  <a:srgbClr val="1E88E5"/>
-                </a:solidFill>
-                <a:latin typeface="Calibri"/>
-              </a:defRPr>
-            </a:pPr>
-            <a:r>
-              <a:t>Setup Commands</a:t>
-            </a:r>
-          </a:p>
-        </p:txBody>
-      </p:sp>
-      <p:sp>
-        <p:nvSpPr>
-          <p:cNvPr id="8" name="TextBox 7"/>
+            <a:pPr algn="ctr">
+              <a:defRPr sz="1100" b="0">
+                <a:solidFill>
+                  <a:srgbClr val="555555"/>
+                </a:solidFill>
+                <a:latin typeface="Calibri"/>
+              </a:defRPr>
+            </a:pPr>
+            <a:r>
+              <a:t>Admin webhook queue + controls validation</a:t>
+            </a:r>
+          </a:p>
+        </p:txBody>
+      </p:sp>
+      <p:sp>
+        <p:nvSpPr>
+          <p:cNvPr id="12" name="Rectangle 11"/>
+          <p:cNvSpPr/>
+          <p:nvPr/>
+        </p:nvSpPr>
+        <p:spPr>
+          <a:xfrm>
+            <a:off x="0" y="6492240"/>
+            <a:ext cx="12191695" cy="9144"/>
+          </a:xfrm>
+          <a:prstGeom prst="rect">
+            <a:avLst/>
+          </a:prstGeom>
+          <a:solidFill>
+            <a:srgbClr val="D9E2EC"/>
+          </a:solidFill>
+          <a:ln>
+            <a:noFill/>
+          </a:ln>
+          <a:effectLst/>
+        </p:spPr>
+        <p:style>
+          <a:lnRef idx="1">
+            <a:schemeClr val="accent1"/>
+          </a:lnRef>
+          <a:fillRef idx="3">
+            <a:schemeClr val="accent1"/>
+          </a:fillRef>
+          <a:effectRef idx="2">
+            <a:schemeClr val="accent1"/>
+          </a:effectRef>
+          <a:fontRef idx="minor">
+            <a:schemeClr val="lt1"/>
+          </a:fontRef>
+        </p:style>
+        <p:txBody>
+          <a:bodyPr rtlCol="0" anchor="ctr"/>
+          <a:lstStyle/>
+          <a:p>
+            <a:pPr algn="ctr"/>
+          </a:p>
+        </p:txBody>
+      </p:sp>
+      <p:sp>
+        <p:nvSpPr>
+          <p:cNvPr id="13" name="TextBox 12"/>
           <p:cNvSpPr txBox="1"/>
           <p:nvPr/>
         </p:nvSpPr>
         <p:spPr>
           <a:xfrm>
-            <a:off x="6583680" y="1920240"/>
-            <a:ext cx="4572000" cy="2743200"/>
+            <a:off x="320040" y="6565392"/>
+            <a:ext cx="5943600" cy="228600"/>
           </a:xfrm>
           <a:prstGeom prst="rect">
             <a:avLst/>
@@ -10286,113 +10907,30 @@
           </a:bodyPr>
           <a:lstStyle/>
           <a:p>
-            <a:pPr>
-              <a:spcAft>
-                <a:spcPts val="500"/>
-              </a:spcAft>
-              <a:defRPr sz="1400">
-                <a:solidFill>
-                  <a:srgbClr val="1A1A2E"/>
-                </a:solidFill>
-                <a:latin typeface="Calibri"/>
-              </a:defRPr>
-            </a:pPr>
-            <a:r>
-              <a:t>npm install</a:t>
-            </a:r>
-          </a:p>
-          <a:p>
-            <a:pPr>
-              <a:spcAft>
-                <a:spcPts val="500"/>
-              </a:spcAft>
-              <a:defRPr sz="1400">
-                <a:solidFill>
-                  <a:srgbClr val="1A1A2E"/>
-                </a:solidFill>
-                <a:latin typeface="Calibri"/>
-              </a:defRPr>
-            </a:pPr>
-            <a:r>
-              <a:t>npm run db:relational-schema</a:t>
-            </a:r>
-          </a:p>
-          <a:p>
-            <a:pPr>
-              <a:spcAft>
-                <a:spcPts val="500"/>
-              </a:spcAft>
-              <a:defRPr sz="1400">
-                <a:solidFill>
-                  <a:srgbClr val="1A1A2E"/>
-                </a:solidFill>
-                <a:latin typeface="Calibri"/>
-              </a:defRPr>
-            </a:pPr>
-            <a:r>
-              <a:t>npm run seed</a:t>
-            </a:r>
-          </a:p>
-          <a:p>
-            <a:pPr>
-              <a:spcAft>
-                <a:spcPts val="500"/>
-              </a:spcAft>
-              <a:defRPr sz="1400">
-                <a:solidFill>
-                  <a:srgbClr val="1A1A2E"/>
-                </a:solidFill>
-                <a:latin typeface="Calibri"/>
-              </a:defRPr>
-            </a:pPr>
-            <a:r>
-              <a:t>npm run dev (backend)</a:t>
-            </a:r>
-          </a:p>
-          <a:p>
-            <a:pPr>
-              <a:spcAft>
-                <a:spcPts val="500"/>
-              </a:spcAft>
-              <a:defRPr sz="1400">
-                <a:solidFill>
-                  <a:srgbClr val="1A1A2E"/>
-                </a:solidFill>
-                <a:latin typeface="Calibri"/>
-              </a:defRPr>
-            </a:pPr>
-            <a:r>
-              <a:t>npm start (frontend, port 3000)</a:t>
-            </a:r>
-          </a:p>
-          <a:p>
-            <a:pPr>
-              <a:spcAft>
-                <a:spcPts val="500"/>
-              </a:spcAft>
-              <a:defRPr sz="1400">
-                <a:solidFill>
-                  <a:srgbClr val="1A1A2E"/>
-                </a:solidFill>
-                <a:latin typeface="Calibri"/>
-              </a:defRPr>
-            </a:pPr>
-            <a:r>
-              <a:t>npm run smoke (API test)</a:t>
-            </a:r>
-          </a:p>
-        </p:txBody>
-      </p:sp>
-      <p:sp>
-        <p:nvSpPr>
-          <p:cNvPr id="9" name="TextBox 8"/>
+            <a:pPr algn="l">
+              <a:defRPr sz="1000" b="0">
+                <a:solidFill>
+                  <a:srgbClr val="555555"/>
+                </a:solidFill>
+                <a:latin typeface="Calibri"/>
+              </a:defRPr>
+            </a:pPr>
+            <a:r>
+              <a:t>NGO-Connect | Architecture, Delivery, and Validation</a:t>
+            </a:r>
+          </a:p>
+        </p:txBody>
+      </p:sp>
+      <p:sp>
+        <p:nvSpPr>
+          <p:cNvPr id="14" name="TextBox 13"/>
           <p:cNvSpPr txBox="1"/>
           <p:nvPr/>
         </p:nvSpPr>
         <p:spPr>
           <a:xfrm>
-            <a:off x="731520" y="4572000"/>
-            <a:ext cx="10058400" cy="457200"/>
+            <a:off x="9326880" y="6565392"/>
+            <a:ext cx="2468880" cy="228600"/>
           </a:xfrm>
           <a:prstGeom prst="rect">
             <a:avLst/>
@@ -10405,87 +10943,16 @@
           </a:bodyPr>
           <a:lstStyle/>
           <a:p>
-            <a:pPr algn="l">
-              <a:defRPr sz="2200" b="1">
-                <a:solidFill>
-                  <a:srgbClr val="FF6B35"/>
-                </a:solidFill>
-                <a:latin typeface="Calibri"/>
-              </a:defRPr>
-            </a:pPr>
-            <a:r>
-              <a:t>Seed Credentials</a:t>
-            </a:r>
-          </a:p>
-        </p:txBody>
-      </p:sp>
-      <p:sp>
-        <p:nvSpPr>
-          <p:cNvPr id="10" name="TextBox 9"/>
-          <p:cNvSpPr txBox="1"/>
-          <p:nvPr/>
-        </p:nvSpPr>
-        <p:spPr>
-          <a:xfrm>
-            <a:off x="914400" y="5120640"/>
-            <a:ext cx="10058400" cy="1371600"/>
-          </a:xfrm>
-          <a:prstGeom prst="rect">
-            <a:avLst/>
-          </a:prstGeom>
-          <a:noFill/>
-        </p:spPr>
-        <p:txBody>
-          <a:bodyPr wrap="square">
-            <a:spAutoFit/>
-          </a:bodyPr>
-          <a:lstStyle/>
-          <a:p>
-            <a:pPr>
-              <a:spcAft>
-                <a:spcPts val="600"/>
-              </a:spcAft>
-              <a:defRPr sz="1500">
-                <a:solidFill>
-                  <a:srgbClr val="1A1A2E"/>
-                </a:solidFill>
-                <a:latin typeface="Calibri"/>
-              </a:defRPr>
-            </a:pPr>
-            <a:r>
-              <a:t>Admin:  admin@ngoconnect.org  /  password123</a:t>
-            </a:r>
-          </a:p>
-          <a:p>
-            <a:pPr>
-              <a:spcAft>
-                <a:spcPts val="600"/>
-              </a:spcAft>
-              <a:defRPr sz="1500">
-                <a:solidFill>
-                  <a:srgbClr val="1A1A2E"/>
-                </a:solidFill>
-                <a:latin typeface="Calibri"/>
-              </a:defRPr>
-            </a:pPr>
-            <a:r>
-              <a:t>User:   rahul@example.com  /  password123</a:t>
-            </a:r>
-          </a:p>
-          <a:p>
-            <a:pPr>
-              <a:spcAft>
-                <a:spcPts val="600"/>
-              </a:spcAft>
-              <a:defRPr sz="1500">
-                <a:solidFill>
-                  <a:srgbClr val="1A1A2E"/>
-                </a:solidFill>
-                <a:latin typeface="Calibri"/>
-              </a:defRPr>
-            </a:pPr>
-            <a:r>
-              <a:t>NGO:    akshayapatra@ngo.org  /  password123</a:t>
+            <a:pPr algn="r">
+              <a:defRPr sz="1000" b="0">
+                <a:solidFill>
+                  <a:srgbClr val="555555"/>
+                </a:solidFill>
+                <a:latin typeface="Calibri"/>
+              </a:defRPr>
+            </a:pPr>
+            <a:r>
+              <a:t>Slide 21/25</a:t>
             </a:r>
           </a:p>
         </p:txBody>
@@ -10560,8 +11027,8 @@
         </p:nvSpPr>
         <p:spPr>
           <a:xfrm>
-            <a:off x="0" y="4206240"/>
-            <a:ext cx="12191695" cy="45720"/>
+            <a:off x="0" y="3200400"/>
+            <a:ext cx="12191695" cy="36576"/>
           </a:xfrm>
           <a:prstGeom prst="rect">
             <a:avLst/>
@@ -10619,7 +11086,7 @@
           <a:lstStyle/>
           <a:p>
             <a:pPr algn="ctr">
-              <a:defRPr sz="5600" b="1">
+              <a:defRPr sz="4400" b="1">
                 <a:solidFill>
                   <a:srgbClr val="FFFFFF"/>
                 </a:solidFill>
@@ -10627,7 +11094,7 @@
               </a:defRPr>
             </a:pPr>
             <a:r>
-              <a:t>Thank You</a:t>
+              <a:t>Frontend Application</a:t>
             </a:r>
           </a:p>
         </p:txBody>
@@ -10640,7 +11107,7 @@
         </p:nvSpPr>
         <p:spPr>
           <a:xfrm>
-            <a:off x="914400" y="3200400"/>
+            <a:off x="914400" y="3383280"/>
             <a:ext cx="10058400" cy="731520"/>
           </a:xfrm>
           <a:prstGeom prst="rect">
@@ -10655,29 +11122,135 @@
           <a:lstStyle/>
           <a:p>
             <a:pPr algn="ctr">
-              <a:defRPr sz="2800" b="0">
-                <a:solidFill>
-                  <a:srgbClr val="009688"/>
-                </a:solidFill>
-                <a:latin typeface="Calibri"/>
-              </a:defRPr>
-            </a:pPr>
-            <a:r>
-              <a:t>Questions &amp; Discussion</a:t>
-            </a:r>
-          </a:p>
-        </p:txBody>
-      </p:sp>
-      <p:sp>
-        <p:nvSpPr>
-          <p:cNvPr id="6" name="TextBox 5"/>
+              <a:defRPr sz="2000" b="0">
+                <a:solidFill>
+                  <a:srgbClr val="B0BEC5"/>
+                </a:solidFill>
+                <a:latin typeface="Calibri"/>
+              </a:defRPr>
+            </a:pPr>
+            <a:r>
+              <a:t>React 18 SPA with 31+ Pages &amp; Role-Based Routing</a:t>
+            </a:r>
+          </a:p>
+        </p:txBody>
+      </p:sp>
+    </p:spTree>
+  </p:cSld>
+  <p:clrMapOvr>
+    <a:masterClrMapping/>
+  </p:clrMapOvr>
+</p:sld>
+</file>
+
+<file path=ppt/slides/slide23.xml><?xml version="1.0" encoding="utf-8"?>
+<p:sld xmlns:a="http://schemas.openxmlformats.org/drawingml/2006/main" xmlns:p="http://schemas.openxmlformats.org/presentationml/2006/main" xmlns:r="http://schemas.openxmlformats.org/officeDocument/2006/relationships">
+  <p:cSld>
+    <p:spTree>
+      <p:nvGrpSpPr>
+        <p:cNvPr id="1" name=""/>
+        <p:cNvGrpSpPr/>
+        <p:nvPr/>
+      </p:nvGrpSpPr>
+      <p:grpSpPr/>
+      <p:sp>
+        <p:nvSpPr>
+          <p:cNvPr id="2" name="Rectangle 1"/>
+          <p:cNvSpPr/>
+          <p:nvPr/>
+        </p:nvSpPr>
+        <p:spPr>
+          <a:xfrm>
+            <a:off x="0" y="0"/>
+            <a:ext cx="12191695" cy="6858000"/>
+          </a:xfrm>
+          <a:prstGeom prst="rect">
+            <a:avLst/>
+          </a:prstGeom>
+          <a:solidFill>
+            <a:srgbClr val="FFFFFF"/>
+          </a:solidFill>
+          <a:ln>
+            <a:noFill/>
+          </a:ln>
+          <a:effectLst/>
+        </p:spPr>
+        <p:style>
+          <a:lnRef idx="1">
+            <a:schemeClr val="accent1"/>
+          </a:lnRef>
+          <a:fillRef idx="3">
+            <a:schemeClr val="accent1"/>
+          </a:fillRef>
+          <a:effectRef idx="2">
+            <a:schemeClr val="accent1"/>
+          </a:effectRef>
+          <a:fontRef idx="minor">
+            <a:schemeClr val="lt1"/>
+          </a:fontRef>
+        </p:style>
+        <p:txBody>
+          <a:bodyPr rtlCol="0" anchor="ctr"/>
+          <a:lstStyle/>
+          <a:p>
+            <a:pPr algn="ctr"/>
+          </a:p>
+        </p:txBody>
+      </p:sp>
+      <p:sp>
+        <p:nvSpPr>
+          <p:cNvPr id="3" name="Rectangle 2"/>
+          <p:cNvSpPr/>
+          <p:nvPr/>
+        </p:nvSpPr>
+        <p:spPr>
+          <a:xfrm>
+            <a:off x="0" y="0"/>
+            <a:ext cx="12191695" cy="54864"/>
+          </a:xfrm>
+          <a:prstGeom prst="rect">
+            <a:avLst/>
+          </a:prstGeom>
+          <a:solidFill>
+            <a:srgbClr val="0B1D51"/>
+          </a:solidFill>
+          <a:ln>
+            <a:noFill/>
+          </a:ln>
+          <a:effectLst/>
+        </p:spPr>
+        <p:style>
+          <a:lnRef idx="1">
+            <a:schemeClr val="accent1"/>
+          </a:lnRef>
+          <a:fillRef idx="3">
+            <a:schemeClr val="accent1"/>
+          </a:fillRef>
+          <a:effectRef idx="2">
+            <a:schemeClr val="accent1"/>
+          </a:effectRef>
+          <a:fontRef idx="minor">
+            <a:schemeClr val="lt1"/>
+          </a:fontRef>
+        </p:style>
+        <p:txBody>
+          <a:bodyPr rtlCol="0" anchor="ctr"/>
+          <a:lstStyle/>
+          <a:p>
+            <a:pPr algn="ctr"/>
+          </a:p>
+        </p:txBody>
+      </p:sp>
+      <p:sp>
+        <p:nvSpPr>
+          <p:cNvPr id="4" name="TextBox 3"/>
           <p:cNvSpPr txBox="1"/>
           <p:nvPr/>
         </p:nvSpPr>
         <p:spPr>
           <a:xfrm>
-            <a:off x="914400" y="4572000"/>
-            <a:ext cx="10058400" cy="914400"/>
+            <a:off x="731520" y="457200"/>
+            <a:ext cx="10058400" cy="731520"/>
           </a:xfrm>
           <a:prstGeom prst="rect">
             <a:avLst/>
@@ -10690,6 +11263,1682 @@
           </a:bodyPr>
           <a:lstStyle/>
           <a:p>
+            <a:pPr algn="l">
+              <a:defRPr sz="3600" b="1">
+                <a:solidFill>
+                  <a:srgbClr val="0B1D51"/>
+                </a:solidFill>
+                <a:latin typeface="Calibri"/>
+              </a:defRPr>
+            </a:pPr>
+            <a:r>
+              <a:t>Frontend Page Architecture</a:t>
+            </a:r>
+          </a:p>
+        </p:txBody>
+      </p:sp>
+      <p:sp>
+        <p:nvSpPr>
+          <p:cNvPr id="5" name="TextBox 4"/>
+          <p:cNvSpPr txBox="1"/>
+          <p:nvPr/>
+        </p:nvSpPr>
+        <p:spPr>
+          <a:xfrm>
+            <a:off x="365760" y="1371600"/>
+            <a:ext cx="3566160" cy="457200"/>
+          </a:xfrm>
+          <a:prstGeom prst="rect">
+            <a:avLst/>
+          </a:prstGeom>
+          <a:noFill/>
+        </p:spPr>
+        <p:txBody>
+          <a:bodyPr wrap="square">
+            <a:spAutoFit/>
+          </a:bodyPr>
+          <a:lstStyle/>
+          <a:p>
+            <a:pPr algn="l">
+              <a:defRPr sz="2000" b="1">
+                <a:solidFill>
+                  <a:srgbClr val="1E88E5"/>
+                </a:solidFill>
+                <a:latin typeface="Calibri"/>
+              </a:defRPr>
+            </a:pPr>
+            <a:r>
+              <a:t>Public (8+)</a:t>
+            </a:r>
+          </a:p>
+        </p:txBody>
+      </p:sp>
+      <p:sp>
+        <p:nvSpPr>
+          <p:cNvPr id="6" name="Rounded Rectangle 5"/>
+          <p:cNvSpPr/>
+          <p:nvPr/>
+        </p:nvSpPr>
+        <p:spPr>
+          <a:xfrm>
+            <a:off x="365760" y="1920240"/>
+            <a:ext cx="3566160" cy="4114800"/>
+          </a:xfrm>
+          <a:prstGeom prst="roundRect">
+            <a:avLst/>
+          </a:prstGeom>
+          <a:solidFill>
+            <a:srgbClr val="F0F4F8"/>
+          </a:solidFill>
+          <a:ln w="19050">
+            <a:solidFill>
+              <a:srgbClr val="1E88E5"/>
+            </a:solidFill>
+          </a:ln>
+          <a:effectLst/>
+        </p:spPr>
+        <p:style>
+          <a:lnRef idx="1">
+            <a:schemeClr val="accent1"/>
+          </a:lnRef>
+          <a:fillRef idx="3">
+            <a:schemeClr val="accent1"/>
+          </a:fillRef>
+          <a:effectRef idx="2">
+            <a:schemeClr val="accent1"/>
+          </a:effectRef>
+          <a:fontRef idx="minor">
+            <a:schemeClr val="lt1"/>
+          </a:fontRef>
+        </p:style>
+        <p:txBody>
+          <a:bodyPr rtlCol="0" anchor="ctr"/>
+          <a:lstStyle/>
+          <a:p>
+            <a:pPr algn="ctr"/>
+          </a:p>
+        </p:txBody>
+      </p:sp>
+      <p:sp>
+        <p:nvSpPr>
+          <p:cNvPr id="7" name="TextBox 6"/>
+          <p:cNvSpPr txBox="1"/>
+          <p:nvPr/>
+        </p:nvSpPr>
+        <p:spPr>
+          <a:xfrm>
+            <a:off x="548640" y="2103120"/>
+            <a:ext cx="3200400" cy="3657600"/>
+          </a:xfrm>
+          <a:prstGeom prst="rect">
+            <a:avLst/>
+          </a:prstGeom>
+          <a:noFill/>
+        </p:spPr>
+        <p:txBody>
+          <a:bodyPr wrap="square">
+            <a:spAutoFit/>
+          </a:bodyPr>
+          <a:lstStyle/>
+          <a:p>
+            <a:pPr>
+              <a:spcAft>
+                <a:spcPts val="800"/>
+              </a:spcAft>
+              <a:defRPr sz="1200">
+                <a:solidFill>
+                  <a:srgbClr val="1A1A2E"/>
+                </a:solidFill>
+                <a:latin typeface="Calibri"/>
+              </a:defRPr>
+            </a:pPr>
+            <a:r>
+              <a:t>Home — Landing with hero CTA, helplines, categories</a:t>
+            </a:r>
+          </a:p>
+          <a:p>
+            <a:pPr>
+              <a:spcAft>
+                <a:spcPts val="800"/>
+              </a:spcAft>
+              <a:defRPr sz="1200">
+                <a:solidFill>
+                  <a:srgbClr val="1A1A2E"/>
+                </a:solidFill>
+                <a:latin typeface="Calibri"/>
+              </a:defRPr>
+            </a:pPr>
+            <a:r>
+              <a:t>Login / Register — Dual-mode (user + NGO)</a:t>
+            </a:r>
+          </a:p>
+          <a:p>
+            <a:pPr>
+              <a:spcAft>
+                <a:spcPts val="800"/>
+              </a:spcAft>
+              <a:defRPr sz="1200">
+                <a:solidFill>
+                  <a:srgbClr val="1A1A2E"/>
+                </a:solidFill>
+                <a:latin typeface="Calibri"/>
+              </a:defRPr>
+            </a:pPr>
+            <a:r>
+              <a:t>NGO List &amp; Profile — Search, filter, tabs, charts</a:t>
+            </a:r>
+          </a:p>
+          <a:p>
+            <a:pPr>
+              <a:spcAft>
+                <a:spcPts val="800"/>
+              </a:spcAft>
+              <a:defRPr sz="1200">
+                <a:solidFill>
+                  <a:srgbClr val="1A1A2E"/>
+                </a:solidFill>
+                <a:latin typeface="Calibri"/>
+              </a:defRPr>
+            </a:pPr>
+            <a:r>
+              <a:t>Campaign List &amp; Details — Donation + volunteer flows</a:t>
+            </a:r>
+          </a:p>
+          <a:p>
+            <a:pPr>
+              <a:spcAft>
+                <a:spcPts val="800"/>
+              </a:spcAft>
+              <a:defRPr sz="1200">
+                <a:solidFill>
+                  <a:srgbClr val="1A1A2E"/>
+                </a:solidFill>
+                <a:latin typeface="Calibri"/>
+              </a:defRPr>
+            </a:pPr>
+            <a:r>
+              <a:t>Chatbot — AI support with suggested questions</a:t>
+            </a:r>
+          </a:p>
+        </p:txBody>
+      </p:sp>
+      <p:sp>
+        <p:nvSpPr>
+          <p:cNvPr id="8" name="TextBox 7"/>
+          <p:cNvSpPr txBox="1"/>
+          <p:nvPr/>
+        </p:nvSpPr>
+        <p:spPr>
+          <a:xfrm>
+            <a:off x="4206240" y="1371600"/>
+            <a:ext cx="3566160" cy="457200"/>
+          </a:xfrm>
+          <a:prstGeom prst="rect">
+            <a:avLst/>
+          </a:prstGeom>
+          <a:noFill/>
+        </p:spPr>
+        <p:txBody>
+          <a:bodyPr wrap="square">
+            <a:spAutoFit/>
+          </a:bodyPr>
+          <a:lstStyle/>
+          <a:p>
+            <a:pPr algn="l">
+              <a:defRPr sz="2000" b="1">
+                <a:solidFill>
+                  <a:srgbClr val="009688"/>
+                </a:solidFill>
+                <a:latin typeface="Calibri"/>
+              </a:defRPr>
+            </a:pPr>
+            <a:r>
+              <a:t>User (12+)</a:t>
+            </a:r>
+          </a:p>
+        </p:txBody>
+      </p:sp>
+      <p:sp>
+        <p:nvSpPr>
+          <p:cNvPr id="9" name="Rounded Rectangle 8"/>
+          <p:cNvSpPr/>
+          <p:nvPr/>
+        </p:nvSpPr>
+        <p:spPr>
+          <a:xfrm>
+            <a:off x="4206240" y="1920240"/>
+            <a:ext cx="3566160" cy="4114800"/>
+          </a:xfrm>
+          <a:prstGeom prst="roundRect">
+            <a:avLst/>
+          </a:prstGeom>
+          <a:solidFill>
+            <a:srgbClr val="F0F4F8"/>
+          </a:solidFill>
+          <a:ln w="19050">
+            <a:solidFill>
+              <a:srgbClr val="009688"/>
+            </a:solidFill>
+          </a:ln>
+          <a:effectLst/>
+        </p:spPr>
+        <p:style>
+          <a:lnRef idx="1">
+            <a:schemeClr val="accent1"/>
+          </a:lnRef>
+          <a:fillRef idx="3">
+            <a:schemeClr val="accent1"/>
+          </a:fillRef>
+          <a:effectRef idx="2">
+            <a:schemeClr val="accent1"/>
+          </a:effectRef>
+          <a:fontRef idx="minor">
+            <a:schemeClr val="lt1"/>
+          </a:fontRef>
+        </p:style>
+        <p:txBody>
+          <a:bodyPr rtlCol="0" anchor="ctr"/>
+          <a:lstStyle/>
+          <a:p>
+            <a:pPr algn="ctr"/>
+          </a:p>
+        </p:txBody>
+      </p:sp>
+      <p:sp>
+        <p:nvSpPr>
+          <p:cNvPr id="10" name="TextBox 9"/>
+          <p:cNvSpPr txBox="1"/>
+          <p:nvPr/>
+        </p:nvSpPr>
+        <p:spPr>
+          <a:xfrm>
+            <a:off x="4389120" y="2103120"/>
+            <a:ext cx="3200400" cy="3657600"/>
+          </a:xfrm>
+          <a:prstGeom prst="rect">
+            <a:avLst/>
+          </a:prstGeom>
+          <a:noFill/>
+        </p:spPr>
+        <p:txBody>
+          <a:bodyPr wrap="square">
+            <a:spAutoFit/>
+          </a:bodyPr>
+          <a:lstStyle/>
+          <a:p>
+            <a:pPr>
+              <a:spcAft>
+                <a:spcPts val="800"/>
+              </a:spcAft>
+              <a:defRPr sz="1200">
+                <a:solidFill>
+                  <a:srgbClr val="1A1A2E"/>
+                </a:solidFill>
+                <a:latin typeface="Calibri"/>
+              </a:defRPr>
+            </a:pPr>
+            <a:r>
+              <a:t>Dashboard — Help requests, donations, volunteers, certs</a:t>
+            </a:r>
+          </a:p>
+          <a:p>
+            <a:pPr>
+              <a:spcAft>
+                <a:spcPts val="800"/>
+              </a:spcAft>
+              <a:defRPr sz="1200">
+                <a:solidFill>
+                  <a:srgbClr val="1A1A2E"/>
+                </a:solidFill>
+                <a:latin typeface="Calibri"/>
+              </a:defRPr>
+            </a:pPr>
+            <a:r>
+              <a:t>Donate — Campaign selection, payment, receipts</a:t>
+            </a:r>
+          </a:p>
+          <a:p>
+            <a:pPr>
+              <a:spcAft>
+                <a:spcPts val="800"/>
+              </a:spcAft>
+              <a:defRPr sz="1200">
+                <a:solidFill>
+                  <a:srgbClr val="1A1A2E"/>
+                </a:solidFill>
+                <a:latin typeface="Calibri"/>
+              </a:defRPr>
+            </a:pPr>
+            <a:r>
+              <a:t>Volunteer Opportunities — Apply, withdraw, complete</a:t>
+            </a:r>
+          </a:p>
+          <a:p>
+            <a:pPr>
+              <a:spcAft>
+                <a:spcPts val="800"/>
+              </a:spcAft>
+              <a:defRPr sz="1200">
+                <a:solidFill>
+                  <a:srgbClr val="1A1A2E"/>
+                </a:solidFill>
+                <a:latin typeface="Calibri"/>
+              </a:defRPr>
+            </a:pPr>
+            <a:r>
+              <a:t>Recommendations — AI-powered with match scores</a:t>
+            </a:r>
+          </a:p>
+          <a:p>
+            <a:pPr>
+              <a:spcAft>
+                <a:spcPts val="800"/>
+              </a:spcAft>
+              <a:defRPr sz="1200">
+                <a:solidFill>
+                  <a:srgbClr val="1A1A2E"/>
+                </a:solidFill>
+                <a:latin typeface="Calibri"/>
+              </a:defRPr>
+            </a:pPr>
+            <a:r>
+              <a:t>Innovation Center — Giving Circles, Wishlists, etc.</a:t>
+            </a:r>
+          </a:p>
+        </p:txBody>
+      </p:sp>
+      <p:sp>
+        <p:nvSpPr>
+          <p:cNvPr id="11" name="TextBox 10"/>
+          <p:cNvSpPr txBox="1"/>
+          <p:nvPr/>
+        </p:nvSpPr>
+        <p:spPr>
+          <a:xfrm>
+            <a:off x="8046720" y="1371600"/>
+            <a:ext cx="3566160" cy="457200"/>
+          </a:xfrm>
+          <a:prstGeom prst="rect">
+            <a:avLst/>
+          </a:prstGeom>
+          <a:noFill/>
+        </p:spPr>
+        <p:txBody>
+          <a:bodyPr wrap="square">
+            <a:spAutoFit/>
+          </a:bodyPr>
+          <a:lstStyle/>
+          <a:p>
+            <a:pPr algn="l">
+              <a:defRPr sz="2000" b="1">
+                <a:solidFill>
+                  <a:srgbClr val="FF6B35"/>
+                </a:solidFill>
+                <a:latin typeface="Calibri"/>
+              </a:defRPr>
+            </a:pPr>
+            <a:r>
+              <a:t>Admin (8+)</a:t>
+            </a:r>
+          </a:p>
+        </p:txBody>
+      </p:sp>
+      <p:sp>
+        <p:nvSpPr>
+          <p:cNvPr id="12" name="Rounded Rectangle 11"/>
+          <p:cNvSpPr/>
+          <p:nvPr/>
+        </p:nvSpPr>
+        <p:spPr>
+          <a:xfrm>
+            <a:off x="8046720" y="1920240"/>
+            <a:ext cx="3566160" cy="4114800"/>
+          </a:xfrm>
+          <a:prstGeom prst="roundRect">
+            <a:avLst/>
+          </a:prstGeom>
+          <a:solidFill>
+            <a:srgbClr val="F0F4F8"/>
+          </a:solidFill>
+          <a:ln w="19050">
+            <a:solidFill>
+              <a:srgbClr val="FF6B35"/>
+            </a:solidFill>
+          </a:ln>
+          <a:effectLst/>
+        </p:spPr>
+        <p:style>
+          <a:lnRef idx="1">
+            <a:schemeClr val="accent1"/>
+          </a:lnRef>
+          <a:fillRef idx="3">
+            <a:schemeClr val="accent1"/>
+          </a:fillRef>
+          <a:effectRef idx="2">
+            <a:schemeClr val="accent1"/>
+          </a:effectRef>
+          <a:fontRef idx="minor">
+            <a:schemeClr val="lt1"/>
+          </a:fontRef>
+        </p:style>
+        <p:txBody>
+          <a:bodyPr rtlCol="0" anchor="ctr"/>
+          <a:lstStyle/>
+          <a:p>
+            <a:pPr algn="ctr"/>
+          </a:p>
+        </p:txBody>
+      </p:sp>
+      <p:sp>
+        <p:nvSpPr>
+          <p:cNvPr id="13" name="TextBox 12"/>
+          <p:cNvSpPr txBox="1"/>
+          <p:nvPr/>
+        </p:nvSpPr>
+        <p:spPr>
+          <a:xfrm>
+            <a:off x="8229600" y="2103120"/>
+            <a:ext cx="3200400" cy="3657600"/>
+          </a:xfrm>
+          <a:prstGeom prst="rect">
+            <a:avLst/>
+          </a:prstGeom>
+          <a:noFill/>
+        </p:spPr>
+        <p:txBody>
+          <a:bodyPr wrap="square">
+            <a:spAutoFit/>
+          </a:bodyPr>
+          <a:lstStyle/>
+          <a:p>
+            <a:pPr>
+              <a:spcAft>
+                <a:spcPts val="800"/>
+              </a:spcAft>
+              <a:defRPr sz="1200">
+                <a:solidFill>
+                  <a:srgbClr val="1A1A2E"/>
+                </a:solidFill>
+                <a:latin typeface="Calibri"/>
+              </a:defRPr>
+            </a:pPr>
+            <a:r>
+              <a:t>Dashboard — KPI cards, charts, auto-refresh, SSR viewer</a:t>
+            </a:r>
+          </a:p>
+          <a:p>
+            <a:pPr>
+              <a:spcAft>
+                <a:spcPts val="800"/>
+              </a:spcAft>
+              <a:defRPr sz="1200">
+                <a:solidFill>
+                  <a:srgbClr val="1A1A2E"/>
+                </a:solidFill>
+                <a:latin typeface="Calibri"/>
+              </a:defRPr>
+            </a:pPr>
+            <a:r>
+              <a:t>Verifications — NGO approval/rejection queue</a:t>
+            </a:r>
+          </a:p>
+          <a:p>
+            <a:pPr>
+              <a:spcAft>
+                <a:spcPts val="800"/>
+              </a:spcAft>
+              <a:defRPr sz="1200">
+                <a:solidFill>
+                  <a:srgbClr val="1A1A2E"/>
+                </a:solidFill>
+                <a:latin typeface="Calibri"/>
+              </a:defRPr>
+            </a:pPr>
+            <a:r>
+              <a:t>Flagged Content — Moderation &amp; flag request review</a:t>
+            </a:r>
+          </a:p>
+          <a:p>
+            <a:pPr>
+              <a:spcAft>
+                <a:spcPts val="800"/>
+              </a:spcAft>
+              <a:defRPr sz="1200">
+                <a:solidFill>
+                  <a:srgbClr val="1A1A2E"/>
+                </a:solidFill>
+                <a:latin typeface="Calibri"/>
+              </a:defRPr>
+            </a:pPr>
+            <a:r>
+              <a:t>Webhooks — Delivery logs, metrics, replay</a:t>
+            </a:r>
+          </a:p>
+          <a:p>
+            <a:pPr>
+              <a:spcAft>
+                <a:spcPts val="800"/>
+              </a:spcAft>
+              <a:defRPr sz="1200">
+                <a:solidFill>
+                  <a:srgbClr val="1A1A2E"/>
+                </a:solidFill>
+                <a:latin typeface="Calibri"/>
+              </a:defRPr>
+            </a:pPr>
+            <a:r>
+              <a:t>Users / Notifications / Categories / Requests</a:t>
+            </a:r>
+          </a:p>
+        </p:txBody>
+      </p:sp>
+      <p:sp>
+        <p:nvSpPr>
+          <p:cNvPr id="14" name="TextBox 13"/>
+          <p:cNvSpPr txBox="1"/>
+          <p:nvPr/>
+        </p:nvSpPr>
+        <p:spPr>
+          <a:xfrm>
+            <a:off x="457200" y="6309360"/>
+            <a:ext cx="10972800" cy="457200"/>
+          </a:xfrm>
+          <a:prstGeom prst="rect">
+            <a:avLst/>
+          </a:prstGeom>
+          <a:noFill/>
+        </p:spPr>
+        <p:txBody>
+          <a:bodyPr wrap="square">
+            <a:spAutoFit/>
+          </a:bodyPr>
+          <a:lstStyle/>
+          <a:p>
+            <a:pPr algn="ctr">
+              <a:defRPr sz="1300" b="0">
+                <a:solidFill>
+                  <a:srgbClr val="555555"/>
+                </a:solidFill>
+                <a:latin typeface="Calibri"/>
+              </a:defRPr>
+            </a:pPr>
+            <a:r>
+              <a:t>Components: Navbar • ProtectedRoute • UserRoute • AdminRoute • ConfirmModal • PreferencesModal • RecommendedNgos</a:t>
+            </a:r>
+          </a:p>
+        </p:txBody>
+      </p:sp>
+      <p:sp>
+        <p:nvSpPr>
+          <p:cNvPr id="15" name="Rectangle 14"/>
+          <p:cNvSpPr/>
+          <p:nvPr/>
+        </p:nvSpPr>
+        <p:spPr>
+          <a:xfrm>
+            <a:off x="0" y="6492240"/>
+            <a:ext cx="12191695" cy="9144"/>
+          </a:xfrm>
+          <a:prstGeom prst="rect">
+            <a:avLst/>
+          </a:prstGeom>
+          <a:solidFill>
+            <a:srgbClr val="D9E2EC"/>
+          </a:solidFill>
+          <a:ln>
+            <a:noFill/>
+          </a:ln>
+          <a:effectLst/>
+        </p:spPr>
+        <p:style>
+          <a:lnRef idx="1">
+            <a:schemeClr val="accent1"/>
+          </a:lnRef>
+          <a:fillRef idx="3">
+            <a:schemeClr val="accent1"/>
+          </a:fillRef>
+          <a:effectRef idx="2">
+            <a:schemeClr val="accent1"/>
+          </a:effectRef>
+          <a:fontRef idx="minor">
+            <a:schemeClr val="lt1"/>
+          </a:fontRef>
+        </p:style>
+        <p:txBody>
+          <a:bodyPr rtlCol="0" anchor="ctr"/>
+          <a:lstStyle/>
+          <a:p>
+            <a:pPr algn="ctr"/>
+          </a:p>
+        </p:txBody>
+      </p:sp>
+      <p:sp>
+        <p:nvSpPr>
+          <p:cNvPr id="16" name="TextBox 15"/>
+          <p:cNvSpPr txBox="1"/>
+          <p:nvPr/>
+        </p:nvSpPr>
+        <p:spPr>
+          <a:xfrm>
+            <a:off x="320040" y="6565392"/>
+            <a:ext cx="5943600" cy="228600"/>
+          </a:xfrm>
+          <a:prstGeom prst="rect">
+            <a:avLst/>
+          </a:prstGeom>
+          <a:noFill/>
+        </p:spPr>
+        <p:txBody>
+          <a:bodyPr wrap="square">
+            <a:spAutoFit/>
+          </a:bodyPr>
+          <a:lstStyle/>
+          <a:p>
+            <a:pPr algn="l">
+              <a:defRPr sz="1000" b="0">
+                <a:solidFill>
+                  <a:srgbClr val="555555"/>
+                </a:solidFill>
+                <a:latin typeface="Calibri"/>
+              </a:defRPr>
+            </a:pPr>
+            <a:r>
+              <a:t>NGO-Connect | Architecture, Delivery, and Validation</a:t>
+            </a:r>
+          </a:p>
+        </p:txBody>
+      </p:sp>
+      <p:sp>
+        <p:nvSpPr>
+          <p:cNvPr id="17" name="TextBox 16"/>
+          <p:cNvSpPr txBox="1"/>
+          <p:nvPr/>
+        </p:nvSpPr>
+        <p:spPr>
+          <a:xfrm>
+            <a:off x="9326880" y="6565392"/>
+            <a:ext cx="2468880" cy="228600"/>
+          </a:xfrm>
+          <a:prstGeom prst="rect">
+            <a:avLst/>
+          </a:prstGeom>
+          <a:noFill/>
+        </p:spPr>
+        <p:txBody>
+          <a:bodyPr wrap="square">
+            <a:spAutoFit/>
+          </a:bodyPr>
+          <a:lstStyle/>
+          <a:p>
+            <a:pPr algn="r">
+              <a:defRPr sz="1000" b="0">
+                <a:solidFill>
+                  <a:srgbClr val="555555"/>
+                </a:solidFill>
+                <a:latin typeface="Calibri"/>
+              </a:defRPr>
+            </a:pPr>
+            <a:r>
+              <a:t>Slide 23/25</a:t>
+            </a:r>
+          </a:p>
+        </p:txBody>
+      </p:sp>
+    </p:spTree>
+  </p:cSld>
+  <p:clrMapOvr>
+    <a:masterClrMapping/>
+  </p:clrMapOvr>
+</p:sld>
+</file>
+
+<file path=ppt/slides/slide24.xml><?xml version="1.0" encoding="utf-8"?>
+<p:sld xmlns:a="http://schemas.openxmlformats.org/drawingml/2006/main" xmlns:p="http://schemas.openxmlformats.org/presentationml/2006/main" xmlns:r="http://schemas.openxmlformats.org/officeDocument/2006/relationships">
+  <p:cSld>
+    <p:spTree>
+      <p:nvGrpSpPr>
+        <p:cNvPr id="1" name=""/>
+        <p:cNvGrpSpPr/>
+        <p:nvPr/>
+      </p:nvGrpSpPr>
+      <p:grpSpPr/>
+      <p:sp>
+        <p:nvSpPr>
+          <p:cNvPr id="2" name="Rectangle 1"/>
+          <p:cNvSpPr/>
+          <p:nvPr/>
+        </p:nvSpPr>
+        <p:spPr>
+          <a:xfrm>
+            <a:off x="0" y="0"/>
+            <a:ext cx="12191695" cy="6858000"/>
+          </a:xfrm>
+          <a:prstGeom prst="rect">
+            <a:avLst/>
+          </a:prstGeom>
+          <a:solidFill>
+            <a:srgbClr val="FFFFFF"/>
+          </a:solidFill>
+          <a:ln>
+            <a:noFill/>
+          </a:ln>
+          <a:effectLst/>
+        </p:spPr>
+        <p:style>
+          <a:lnRef idx="1">
+            <a:schemeClr val="accent1"/>
+          </a:lnRef>
+          <a:fillRef idx="3">
+            <a:schemeClr val="accent1"/>
+          </a:fillRef>
+          <a:effectRef idx="2">
+            <a:schemeClr val="accent1"/>
+          </a:effectRef>
+          <a:fontRef idx="minor">
+            <a:schemeClr val="lt1"/>
+          </a:fontRef>
+        </p:style>
+        <p:txBody>
+          <a:bodyPr rtlCol="0" anchor="ctr"/>
+          <a:lstStyle/>
+          <a:p>
+            <a:pPr algn="ctr"/>
+          </a:p>
+        </p:txBody>
+      </p:sp>
+      <p:sp>
+        <p:nvSpPr>
+          <p:cNvPr id="3" name="Rectangle 2"/>
+          <p:cNvSpPr/>
+          <p:nvPr/>
+        </p:nvSpPr>
+        <p:spPr>
+          <a:xfrm>
+            <a:off x="0" y="0"/>
+            <a:ext cx="12191695" cy="54864"/>
+          </a:xfrm>
+          <a:prstGeom prst="rect">
+            <a:avLst/>
+          </a:prstGeom>
+          <a:solidFill>
+            <a:srgbClr val="0B1D51"/>
+          </a:solidFill>
+          <a:ln>
+            <a:noFill/>
+          </a:ln>
+          <a:effectLst/>
+        </p:spPr>
+        <p:style>
+          <a:lnRef idx="1">
+            <a:schemeClr val="accent1"/>
+          </a:lnRef>
+          <a:fillRef idx="3">
+            <a:schemeClr val="accent1"/>
+          </a:fillRef>
+          <a:effectRef idx="2">
+            <a:schemeClr val="accent1"/>
+          </a:effectRef>
+          <a:fontRef idx="minor">
+            <a:schemeClr val="lt1"/>
+          </a:fontRef>
+        </p:style>
+        <p:txBody>
+          <a:bodyPr rtlCol="0" anchor="ctr"/>
+          <a:lstStyle/>
+          <a:p>
+            <a:pPr algn="ctr"/>
+          </a:p>
+        </p:txBody>
+      </p:sp>
+      <p:sp>
+        <p:nvSpPr>
+          <p:cNvPr id="4" name="TextBox 3"/>
+          <p:cNvSpPr txBox="1"/>
+          <p:nvPr/>
+        </p:nvSpPr>
+        <p:spPr>
+          <a:xfrm>
+            <a:off x="731520" y="457200"/>
+            <a:ext cx="10058400" cy="731520"/>
+          </a:xfrm>
+          <a:prstGeom prst="rect">
+            <a:avLst/>
+          </a:prstGeom>
+          <a:noFill/>
+        </p:spPr>
+        <p:txBody>
+          <a:bodyPr wrap="square">
+            <a:spAutoFit/>
+          </a:bodyPr>
+          <a:lstStyle/>
+          <a:p>
+            <a:pPr algn="l">
+              <a:defRPr sz="3600" b="1">
+                <a:solidFill>
+                  <a:srgbClr val="0B1D51"/>
+                </a:solidFill>
+                <a:latin typeface="Calibri"/>
+              </a:defRPr>
+            </a:pPr>
+            <a:r>
+              <a:t>Deployment &amp; Configuration</a:t>
+            </a:r>
+          </a:p>
+        </p:txBody>
+      </p:sp>
+      <p:sp>
+        <p:nvSpPr>
+          <p:cNvPr id="5" name="TextBox 4"/>
+          <p:cNvSpPr txBox="1"/>
+          <p:nvPr/>
+        </p:nvSpPr>
+        <p:spPr>
+          <a:xfrm>
+            <a:off x="731520" y="1371600"/>
+            <a:ext cx="5029200" cy="457200"/>
+          </a:xfrm>
+          <a:prstGeom prst="rect">
+            <a:avLst/>
+          </a:prstGeom>
+          <a:noFill/>
+        </p:spPr>
+        <p:txBody>
+          <a:bodyPr wrap="square">
+            <a:spAutoFit/>
+          </a:bodyPr>
+          <a:lstStyle/>
+          <a:p>
+            <a:pPr algn="l">
+              <a:defRPr sz="2200" b="1">
+                <a:solidFill>
+                  <a:srgbClr val="009688"/>
+                </a:solidFill>
+                <a:latin typeface="Calibri"/>
+              </a:defRPr>
+            </a:pPr>
+            <a:r>
+              <a:t>Backend Environment</a:t>
+            </a:r>
+          </a:p>
+        </p:txBody>
+      </p:sp>
+      <p:sp>
+        <p:nvSpPr>
+          <p:cNvPr id="6" name="TextBox 5"/>
+          <p:cNvSpPr txBox="1"/>
+          <p:nvPr/>
+        </p:nvSpPr>
+        <p:spPr>
+          <a:xfrm>
+            <a:off x="914400" y="1920240"/>
+            <a:ext cx="5029200" cy="2743200"/>
+          </a:xfrm>
+          <a:prstGeom prst="rect">
+            <a:avLst/>
+          </a:prstGeom>
+          <a:noFill/>
+        </p:spPr>
+        <p:txBody>
+          <a:bodyPr wrap="square">
+            <a:spAutoFit/>
+          </a:bodyPr>
+          <a:lstStyle/>
+          <a:p>
+            <a:pPr>
+              <a:spcAft>
+                <a:spcPts val="500"/>
+              </a:spcAft>
+              <a:defRPr sz="1400">
+                <a:solidFill>
+                  <a:srgbClr val="1A1A2E"/>
+                </a:solidFill>
+                <a:latin typeface="Calibri"/>
+              </a:defRPr>
+            </a:pPr>
+            <a:r>
+              <a:t>PORT = 5001</a:t>
+            </a:r>
+          </a:p>
+          <a:p>
+            <a:pPr>
+              <a:spcAft>
+                <a:spcPts val="500"/>
+              </a:spcAft>
+              <a:defRPr sz="1400">
+                <a:solidFill>
+                  <a:srgbClr val="1A1A2E"/>
+                </a:solidFill>
+                <a:latin typeface="Calibri"/>
+              </a:defRPr>
+            </a:pPr>
+            <a:r>
+              <a:t>POSTGRES_URL = postgresql://...</a:t>
+            </a:r>
+          </a:p>
+          <a:p>
+            <a:pPr>
+              <a:spcAft>
+                <a:spcPts val="500"/>
+              </a:spcAft>
+              <a:defRPr sz="1400">
+                <a:solidFill>
+                  <a:srgbClr val="1A1A2E"/>
+                </a:solidFill>
+                <a:latin typeface="Calibri"/>
+              </a:defRPr>
+            </a:pPr>
+            <a:r>
+              <a:t>JWT_SECRET = &lt;strong-secret&gt;</a:t>
+            </a:r>
+          </a:p>
+          <a:p>
+            <a:pPr>
+              <a:spcAft>
+                <a:spcPts val="500"/>
+              </a:spcAft>
+              <a:defRPr sz="1400">
+                <a:solidFill>
+                  <a:srgbClr val="1A1A2E"/>
+                </a:solidFill>
+                <a:latin typeface="Calibri"/>
+              </a:defRPr>
+            </a:pPr>
+            <a:r>
+              <a:t>GEMINI_API_KEY = &lt;optional&gt;</a:t>
+            </a:r>
+          </a:p>
+          <a:p>
+            <a:pPr>
+              <a:spcAft>
+                <a:spcPts val="500"/>
+              </a:spcAft>
+              <a:defRPr sz="1400">
+                <a:solidFill>
+                  <a:srgbClr val="1A1A2E"/>
+                </a:solidFill>
+                <a:latin typeface="Calibri"/>
+              </a:defRPr>
+            </a:pPr>
+            <a:r>
+              <a:t>PAYMENT_GATEWAY_PROVIDER = mock | razorpay</a:t>
+            </a:r>
+          </a:p>
+          <a:p>
+            <a:pPr>
+              <a:spcAft>
+                <a:spcPts val="500"/>
+              </a:spcAft>
+              <a:defRPr sz="1400">
+                <a:solidFill>
+                  <a:srgbClr val="1A1A2E"/>
+                </a:solidFill>
+                <a:latin typeface="Calibri"/>
+              </a:defRPr>
+            </a:pPr>
+            <a:r>
+              <a:t>MAIL_HOST / MAIL_USER / MAIL_PASS = &lt;optional&gt;</a:t>
+            </a:r>
+          </a:p>
+          <a:p>
+            <a:pPr>
+              <a:spcAft>
+                <a:spcPts val="500"/>
+              </a:spcAft>
+              <a:defRPr sz="1400">
+                <a:solidFill>
+                  <a:srgbClr val="1A1A2E"/>
+                </a:solidFill>
+                <a:latin typeface="Calibri"/>
+              </a:defRPr>
+            </a:pPr>
+            <a:r>
+              <a:t>RAZORPAY_KEY_ID = &lt;optional&gt;</a:t>
+            </a:r>
+          </a:p>
+          <a:p>
+            <a:pPr>
+              <a:spcAft>
+                <a:spcPts val="500"/>
+              </a:spcAft>
+              <a:defRPr sz="1400">
+                <a:solidFill>
+                  <a:srgbClr val="1A1A2E"/>
+                </a:solidFill>
+                <a:latin typeface="Calibri"/>
+              </a:defRPr>
+            </a:pPr>
+            <a:r>
+              <a:t>RAZORPAY_KEY_SECRET = &lt;optional&gt;</a:t>
+            </a:r>
+          </a:p>
+          <a:p>
+            <a:pPr>
+              <a:spcAft>
+                <a:spcPts val="500"/>
+              </a:spcAft>
+              <a:defRPr sz="1400">
+                <a:solidFill>
+                  <a:srgbClr val="1A1A2E"/>
+                </a:solidFill>
+                <a:latin typeface="Calibri"/>
+              </a:defRPr>
+            </a:pPr>
+            <a:r>
+              <a:t>WEBHOOK_URL / WEBHOOK_SECRET = &lt;optional&gt;</a:t>
+            </a:r>
+          </a:p>
+        </p:txBody>
+      </p:sp>
+      <p:sp>
+        <p:nvSpPr>
+          <p:cNvPr id="7" name="TextBox 6"/>
+          <p:cNvSpPr txBox="1"/>
+          <p:nvPr/>
+        </p:nvSpPr>
+        <p:spPr>
+          <a:xfrm>
+            <a:off x="6400800" y="1371600"/>
+            <a:ext cx="4572000" cy="457200"/>
+          </a:xfrm>
+          <a:prstGeom prst="rect">
+            <a:avLst/>
+          </a:prstGeom>
+          <a:noFill/>
+        </p:spPr>
+        <p:txBody>
+          <a:bodyPr wrap="square">
+            <a:spAutoFit/>
+          </a:bodyPr>
+          <a:lstStyle/>
+          <a:p>
+            <a:pPr algn="l">
+              <a:defRPr sz="2200" b="1">
+                <a:solidFill>
+                  <a:srgbClr val="1E88E5"/>
+                </a:solidFill>
+                <a:latin typeface="Calibri"/>
+              </a:defRPr>
+            </a:pPr>
+            <a:r>
+              <a:t>Setup Commands</a:t>
+            </a:r>
+          </a:p>
+        </p:txBody>
+      </p:sp>
+      <p:sp>
+        <p:nvSpPr>
+          <p:cNvPr id="8" name="TextBox 7"/>
+          <p:cNvSpPr txBox="1"/>
+          <p:nvPr/>
+        </p:nvSpPr>
+        <p:spPr>
+          <a:xfrm>
+            <a:off x="6583680" y="1920240"/>
+            <a:ext cx="4572000" cy="2743200"/>
+          </a:xfrm>
+          <a:prstGeom prst="rect">
+            <a:avLst/>
+          </a:prstGeom>
+          <a:noFill/>
+        </p:spPr>
+        <p:txBody>
+          <a:bodyPr wrap="square">
+            <a:spAutoFit/>
+          </a:bodyPr>
+          <a:lstStyle/>
+          <a:p>
+            <a:pPr>
+              <a:spcAft>
+                <a:spcPts val="400"/>
+              </a:spcAft>
+              <a:defRPr sz="1300">
+                <a:solidFill>
+                  <a:srgbClr val="1A1A2E"/>
+                </a:solidFill>
+                <a:latin typeface="Calibri"/>
+              </a:defRPr>
+            </a:pPr>
+            <a:r>
+              <a:t>npm install</a:t>
+            </a:r>
+          </a:p>
+          <a:p>
+            <a:pPr>
+              <a:spcAft>
+                <a:spcPts val="400"/>
+              </a:spcAft>
+              <a:defRPr sz="1300">
+                <a:solidFill>
+                  <a:srgbClr val="1A1A2E"/>
+                </a:solidFill>
+                <a:latin typeface="Calibri"/>
+              </a:defRPr>
+            </a:pPr>
+            <a:r>
+              <a:t>npm run db:relational-schema</a:t>
+            </a:r>
+          </a:p>
+          <a:p>
+            <a:pPr>
+              <a:spcAft>
+                <a:spcPts val="400"/>
+              </a:spcAft>
+              <a:defRPr sz="1300">
+                <a:solidFill>
+                  <a:srgbClr val="1A1A2E"/>
+                </a:solidFill>
+                <a:latin typeface="Calibri"/>
+              </a:defRPr>
+            </a:pPr>
+            <a:r>
+              <a:t>npm run seed</a:t>
+            </a:r>
+          </a:p>
+          <a:p>
+            <a:pPr>
+              <a:spcAft>
+                <a:spcPts val="400"/>
+              </a:spcAft>
+              <a:defRPr sz="1300">
+                <a:solidFill>
+                  <a:srgbClr val="1A1A2E"/>
+                </a:solidFill>
+                <a:latin typeface="Calibri"/>
+              </a:defRPr>
+            </a:pPr>
+            <a:r>
+              <a:t>npm run dev (backend)</a:t>
+            </a:r>
+          </a:p>
+          <a:p>
+            <a:pPr>
+              <a:spcAft>
+                <a:spcPts val="400"/>
+              </a:spcAft>
+              <a:defRPr sz="1300">
+                <a:solidFill>
+                  <a:srgbClr val="1A1A2E"/>
+                </a:solidFill>
+                <a:latin typeface="Calibri"/>
+              </a:defRPr>
+            </a:pPr>
+            <a:r>
+              <a:t>npm start (frontend, port 3000)</a:t>
+            </a:r>
+          </a:p>
+          <a:p>
+            <a:pPr>
+              <a:spcAft>
+                <a:spcPts val="400"/>
+              </a:spcAft>
+              <a:defRPr sz="1300">
+                <a:solidFill>
+                  <a:srgbClr val="1A1A2E"/>
+                </a:solidFill>
+                <a:latin typeface="Calibri"/>
+              </a:defRPr>
+            </a:pPr>
+            <a:r>
+              <a:t>npm run smoke (API test)</a:t>
+            </a:r>
+          </a:p>
+          <a:p>
+            <a:pPr>
+              <a:spcAft>
+                <a:spcPts val="400"/>
+              </a:spcAft>
+              <a:defRPr sz="1300">
+                <a:solidFill>
+                  <a:srgbClr val="1A1A2E"/>
+                </a:solidFill>
+                <a:latin typeface="Calibri"/>
+              </a:defRPr>
+            </a:pPr>
+            <a:r>
+              <a:t>npm run scenario:flood (full workflow)</a:t>
+            </a:r>
+          </a:p>
+          <a:p>
+            <a:pPr>
+              <a:spcAft>
+                <a:spcPts val="400"/>
+              </a:spcAft>
+              <a:defRPr sz="1300">
+                <a:solidFill>
+                  <a:srgbClr val="1A1A2E"/>
+                </a:solidFill>
+                <a:latin typeface="Calibri"/>
+              </a:defRPr>
+            </a:pPr>
+            <a:r>
+              <a:t>npm run scenario:roles (moderation flow)</a:t>
+            </a:r>
+          </a:p>
+        </p:txBody>
+      </p:sp>
+      <p:sp>
+        <p:nvSpPr>
+          <p:cNvPr id="9" name="TextBox 8"/>
+          <p:cNvSpPr txBox="1"/>
+          <p:nvPr/>
+        </p:nvSpPr>
+        <p:spPr>
+          <a:xfrm>
+            <a:off x="731520" y="4754880"/>
+            <a:ext cx="10058400" cy="457200"/>
+          </a:xfrm>
+          <a:prstGeom prst="rect">
+            <a:avLst/>
+          </a:prstGeom>
+          <a:noFill/>
+        </p:spPr>
+        <p:txBody>
+          <a:bodyPr wrap="square">
+            <a:spAutoFit/>
+          </a:bodyPr>
+          <a:lstStyle/>
+          <a:p>
+            <a:pPr algn="l">
+              <a:defRPr sz="2200" b="1">
+                <a:solidFill>
+                  <a:srgbClr val="FF6B35"/>
+                </a:solidFill>
+                <a:latin typeface="Calibri"/>
+              </a:defRPr>
+            </a:pPr>
+            <a:r>
+              <a:t>Seed Credentials</a:t>
+            </a:r>
+          </a:p>
+        </p:txBody>
+      </p:sp>
+      <p:sp>
+        <p:nvSpPr>
+          <p:cNvPr id="10" name="TextBox 9"/>
+          <p:cNvSpPr txBox="1"/>
+          <p:nvPr/>
+        </p:nvSpPr>
+        <p:spPr>
+          <a:xfrm>
+            <a:off x="914400" y="5303520"/>
+            <a:ext cx="10058400" cy="1371600"/>
+          </a:xfrm>
+          <a:prstGeom prst="rect">
+            <a:avLst/>
+          </a:prstGeom>
+          <a:noFill/>
+        </p:spPr>
+        <p:txBody>
+          <a:bodyPr wrap="square">
+            <a:spAutoFit/>
+          </a:bodyPr>
+          <a:lstStyle/>
+          <a:p>
+            <a:pPr>
+              <a:spcAft>
+                <a:spcPts val="600"/>
+              </a:spcAft>
+              <a:defRPr sz="1500">
+                <a:solidFill>
+                  <a:srgbClr val="1A1A2E"/>
+                </a:solidFill>
+                <a:latin typeface="Calibri"/>
+              </a:defRPr>
+            </a:pPr>
+            <a:r>
+              <a:t>Admin:  admin@ngoconnect.org  /  password123</a:t>
+            </a:r>
+          </a:p>
+          <a:p>
+            <a:pPr>
+              <a:spcAft>
+                <a:spcPts val="600"/>
+              </a:spcAft>
+              <a:defRPr sz="1500">
+                <a:solidFill>
+                  <a:srgbClr val="1A1A2E"/>
+                </a:solidFill>
+                <a:latin typeface="Calibri"/>
+              </a:defRPr>
+            </a:pPr>
+            <a:r>
+              <a:t>User:   rahul@example.com  /  password123</a:t>
+            </a:r>
+          </a:p>
+          <a:p>
+            <a:pPr>
+              <a:spcAft>
+                <a:spcPts val="600"/>
+              </a:spcAft>
+              <a:defRPr sz="1500">
+                <a:solidFill>
+                  <a:srgbClr val="1A1A2E"/>
+                </a:solidFill>
+                <a:latin typeface="Calibri"/>
+              </a:defRPr>
+            </a:pPr>
+            <a:r>
+              <a:t>NGO:    akshayapatra@ngo.org  /  password123</a:t>
+            </a:r>
+          </a:p>
+        </p:txBody>
+      </p:sp>
+      <p:sp>
+        <p:nvSpPr>
+          <p:cNvPr id="11" name="Rectangle 10"/>
+          <p:cNvSpPr/>
+          <p:nvPr/>
+        </p:nvSpPr>
+        <p:spPr>
+          <a:xfrm>
+            <a:off x="0" y="6492240"/>
+            <a:ext cx="12191695" cy="9144"/>
+          </a:xfrm>
+          <a:prstGeom prst="rect">
+            <a:avLst/>
+          </a:prstGeom>
+          <a:solidFill>
+            <a:srgbClr val="D9E2EC"/>
+          </a:solidFill>
+          <a:ln>
+            <a:noFill/>
+          </a:ln>
+          <a:effectLst/>
+        </p:spPr>
+        <p:style>
+          <a:lnRef idx="1">
+            <a:schemeClr val="accent1"/>
+          </a:lnRef>
+          <a:fillRef idx="3">
+            <a:schemeClr val="accent1"/>
+          </a:fillRef>
+          <a:effectRef idx="2">
+            <a:schemeClr val="accent1"/>
+          </a:effectRef>
+          <a:fontRef idx="minor">
+            <a:schemeClr val="lt1"/>
+          </a:fontRef>
+        </p:style>
+        <p:txBody>
+          <a:bodyPr rtlCol="0" anchor="ctr"/>
+          <a:lstStyle/>
+          <a:p>
+            <a:pPr algn="ctr"/>
+          </a:p>
+        </p:txBody>
+      </p:sp>
+      <p:sp>
+        <p:nvSpPr>
+          <p:cNvPr id="12" name="TextBox 11"/>
+          <p:cNvSpPr txBox="1"/>
+          <p:nvPr/>
+        </p:nvSpPr>
+        <p:spPr>
+          <a:xfrm>
+            <a:off x="320040" y="6565392"/>
+            <a:ext cx="5943600" cy="228600"/>
+          </a:xfrm>
+          <a:prstGeom prst="rect">
+            <a:avLst/>
+          </a:prstGeom>
+          <a:noFill/>
+        </p:spPr>
+        <p:txBody>
+          <a:bodyPr wrap="square">
+            <a:spAutoFit/>
+          </a:bodyPr>
+          <a:lstStyle/>
+          <a:p>
+            <a:pPr algn="l">
+              <a:defRPr sz="1000" b="0">
+                <a:solidFill>
+                  <a:srgbClr val="555555"/>
+                </a:solidFill>
+                <a:latin typeface="Calibri"/>
+              </a:defRPr>
+            </a:pPr>
+            <a:r>
+              <a:t>NGO-Connect | Architecture, Delivery, and Validation</a:t>
+            </a:r>
+          </a:p>
+        </p:txBody>
+      </p:sp>
+      <p:sp>
+        <p:nvSpPr>
+          <p:cNvPr id="13" name="TextBox 12"/>
+          <p:cNvSpPr txBox="1"/>
+          <p:nvPr/>
+        </p:nvSpPr>
+        <p:spPr>
+          <a:xfrm>
+            <a:off x="9326880" y="6565392"/>
+            <a:ext cx="2468880" cy="228600"/>
+          </a:xfrm>
+          <a:prstGeom prst="rect">
+            <a:avLst/>
+          </a:prstGeom>
+          <a:noFill/>
+        </p:spPr>
+        <p:txBody>
+          <a:bodyPr wrap="square">
+            <a:spAutoFit/>
+          </a:bodyPr>
+          <a:lstStyle/>
+          <a:p>
+            <a:pPr algn="r">
+              <a:defRPr sz="1000" b="0">
+                <a:solidFill>
+                  <a:srgbClr val="555555"/>
+                </a:solidFill>
+                <a:latin typeface="Calibri"/>
+              </a:defRPr>
+            </a:pPr>
+            <a:r>
+              <a:t>Slide 24/25</a:t>
+            </a:r>
+          </a:p>
+        </p:txBody>
+      </p:sp>
+    </p:spTree>
+  </p:cSld>
+  <p:clrMapOvr>
+    <a:masterClrMapping/>
+  </p:clrMapOvr>
+</p:sld>
+</file>
+
+<file path=ppt/slides/slide25.xml><?xml version="1.0" encoding="utf-8"?>
+<p:sld xmlns:a="http://schemas.openxmlformats.org/drawingml/2006/main" xmlns:p="http://schemas.openxmlformats.org/presentationml/2006/main" xmlns:r="http://schemas.openxmlformats.org/officeDocument/2006/relationships">
+  <p:cSld>
+    <p:spTree>
+      <p:nvGrpSpPr>
+        <p:cNvPr id="1" name=""/>
+        <p:cNvGrpSpPr/>
+        <p:nvPr/>
+      </p:nvGrpSpPr>
+      <p:grpSpPr/>
+      <p:sp>
+        <p:nvSpPr>
+          <p:cNvPr id="2" name="Rectangle 1"/>
+          <p:cNvSpPr/>
+          <p:nvPr/>
+        </p:nvSpPr>
+        <p:spPr>
+          <a:xfrm>
+            <a:off x="0" y="0"/>
+            <a:ext cx="12191695" cy="6858000"/>
+          </a:xfrm>
+          <a:prstGeom prst="rect">
+            <a:avLst/>
+          </a:prstGeom>
+          <a:solidFill>
+            <a:srgbClr val="0B1D51"/>
+          </a:solidFill>
+          <a:ln>
+            <a:noFill/>
+          </a:ln>
+          <a:effectLst/>
+        </p:spPr>
+        <p:style>
+          <a:lnRef idx="1">
+            <a:schemeClr val="accent1"/>
+          </a:lnRef>
+          <a:fillRef idx="3">
+            <a:schemeClr val="accent1"/>
+          </a:fillRef>
+          <a:effectRef idx="2">
+            <a:schemeClr val="accent1"/>
+          </a:effectRef>
+          <a:fontRef idx="minor">
+            <a:schemeClr val="lt1"/>
+          </a:fontRef>
+        </p:style>
+        <p:txBody>
+          <a:bodyPr rtlCol="0" anchor="ctr"/>
+          <a:lstStyle/>
+          <a:p>
+            <a:pPr algn="ctr"/>
+          </a:p>
+        </p:txBody>
+      </p:sp>
+      <p:sp>
+        <p:nvSpPr>
+          <p:cNvPr id="3" name="Rectangle 2"/>
+          <p:cNvSpPr/>
+          <p:nvPr/>
+        </p:nvSpPr>
+        <p:spPr>
+          <a:xfrm>
+            <a:off x="0" y="4206240"/>
+            <a:ext cx="12191695" cy="45720"/>
+          </a:xfrm>
+          <a:prstGeom prst="rect">
+            <a:avLst/>
+          </a:prstGeom>
+          <a:solidFill>
+            <a:srgbClr val="009688"/>
+          </a:solidFill>
+          <a:ln>
+            <a:noFill/>
+          </a:ln>
+          <a:effectLst/>
+        </p:spPr>
+        <p:style>
+          <a:lnRef idx="1">
+            <a:schemeClr val="accent1"/>
+          </a:lnRef>
+          <a:fillRef idx="3">
+            <a:schemeClr val="accent1"/>
+          </a:fillRef>
+          <a:effectRef idx="2">
+            <a:schemeClr val="accent1"/>
+          </a:effectRef>
+          <a:fontRef idx="minor">
+            <a:schemeClr val="lt1"/>
+          </a:fontRef>
+        </p:style>
+        <p:txBody>
+          <a:bodyPr rtlCol="0" anchor="ctr"/>
+          <a:lstStyle/>
+          <a:p>
+            <a:pPr algn="ctr"/>
+          </a:p>
+        </p:txBody>
+      </p:sp>
+      <p:sp>
+        <p:nvSpPr>
+          <p:cNvPr id="4" name="TextBox 3"/>
+          <p:cNvSpPr txBox="1"/>
+          <p:nvPr/>
+        </p:nvSpPr>
+        <p:spPr>
+          <a:xfrm>
+            <a:off x="914400" y="2011680"/>
+            <a:ext cx="10058400" cy="1097280"/>
+          </a:xfrm>
+          <a:prstGeom prst="rect">
+            <a:avLst/>
+          </a:prstGeom>
+          <a:noFill/>
+        </p:spPr>
+        <p:txBody>
+          <a:bodyPr wrap="square">
+            <a:spAutoFit/>
+          </a:bodyPr>
+          <a:lstStyle/>
+          <a:p>
+            <a:pPr algn="ctr">
+              <a:defRPr sz="5600" b="1">
+                <a:solidFill>
+                  <a:srgbClr val="FFFFFF"/>
+                </a:solidFill>
+                <a:latin typeface="Calibri"/>
+              </a:defRPr>
+            </a:pPr>
+            <a:r>
+              <a:t>Thank You</a:t>
+            </a:r>
+          </a:p>
+        </p:txBody>
+      </p:sp>
+      <p:sp>
+        <p:nvSpPr>
+          <p:cNvPr id="5" name="TextBox 4"/>
+          <p:cNvSpPr txBox="1"/>
+          <p:nvPr/>
+        </p:nvSpPr>
+        <p:spPr>
+          <a:xfrm>
+            <a:off x="914400" y="3200400"/>
+            <a:ext cx="10058400" cy="731520"/>
+          </a:xfrm>
+          <a:prstGeom prst="rect">
+            <a:avLst/>
+          </a:prstGeom>
+          <a:noFill/>
+        </p:spPr>
+        <p:txBody>
+          <a:bodyPr wrap="square">
+            <a:spAutoFit/>
+          </a:bodyPr>
+          <a:lstStyle/>
+          <a:p>
+            <a:pPr algn="ctr">
+              <a:defRPr sz="2800" b="0">
+                <a:solidFill>
+                  <a:srgbClr val="009688"/>
+                </a:solidFill>
+                <a:latin typeface="Calibri"/>
+              </a:defRPr>
+            </a:pPr>
+            <a:r>
+              <a:t>Questions &amp; Discussion</a:t>
+            </a:r>
+          </a:p>
+        </p:txBody>
+      </p:sp>
+      <p:sp>
+        <p:nvSpPr>
+          <p:cNvPr id="6" name="TextBox 5"/>
+          <p:cNvSpPr txBox="1"/>
+          <p:nvPr/>
+        </p:nvSpPr>
+        <p:spPr>
+          <a:xfrm>
+            <a:off x="914400" y="4572000"/>
+            <a:ext cx="10058400" cy="914400"/>
+          </a:xfrm>
+          <a:prstGeom prst="rect">
+            <a:avLst/>
+          </a:prstGeom>
+          <a:noFill/>
+        </p:spPr>
+        <p:txBody>
+          <a:bodyPr wrap="square">
+            <a:spAutoFit/>
+          </a:bodyPr>
+          <a:lstStyle/>
+          <a:p>
             <a:pPr algn="ctr">
               <a:defRPr sz="1600" b="0">
                 <a:solidFill>
@@ -10699,7 +12948,7 @@
               </a:defRPr>
             </a:pPr>
             <a:r>
-              <a:t>89 Endpoints  •  17 Tables  •  28+ Pages  •  AI-Powered</a:t>
+              <a:t>149 Endpoints  •  35 Tables  •  31+ Pages  •  AI-Powered</a:t>
             </a:r>
             <a:br/>
             <a:r>
@@ -10881,7 +13130,7 @@
               </a:defRPr>
             </a:pPr>
             <a:r>
-              <a:t>NGO-Connect is a full-stack web platform bridging NGOs, donors, volunteers, and administrators. It enables transparent donations with payment processing, volunteer management with certificate issuance, AI-powered recommendations, and comprehensive platform administration.</a:t>
+              <a:t>NGO-Connect is a full-stack web platform bridging NGOs, donors, volunteers, and administrators. It enables transparent donations, volunteer management, AI-powered recommendations, and an Innovation Center for expanded community engagement.</a:t>
             </a:r>
           </a:p>
         </p:txBody>
@@ -10937,7 +13186,7 @@
               </a:defRPr>
             </a:pPr>
             <a:r>
-              <a:t>89</a:t>
+              <a:t>149</a:t>
             </a:r>
           </a:p>
           <a:p>
@@ -11010,7 +13259,7 @@
               </a:defRPr>
             </a:pPr>
             <a:r>
-              <a:t>13</a:t>
+              <a:t>14</a:t>
             </a:r>
           </a:p>
           <a:p>
@@ -11083,7 +13332,7 @@
               </a:defRPr>
             </a:pPr>
             <a:r>
-              <a:t>17</a:t>
+              <a:t>35</a:t>
             </a:r>
           </a:p>
           <a:p>
@@ -11156,7 +13405,7 @@
               </a:defRPr>
             </a:pPr>
             <a:r>
-              <a:t>28+</a:t>
+              <a:t>31+</a:t>
             </a:r>
           </a:p>
           <a:p>
@@ -11228,7 +13477,7 @@
               </a:defRPr>
             </a:pPr>
             <a:r>
-              <a:t>✓  AI chatbot powered by Google Gemini with RAG</a:t>
+              <a:t>✓  Innovation Center: Giving Circles, Wishlists, Shifts, CRM</a:t>
             </a:r>
           </a:p>
           <a:p>
@@ -11244,7 +13493,7 @@
               </a:defRPr>
             </a:pPr>
             <a:r>
-              <a:t>✓  Role-based access: User, NGO, Admin</a:t>
+              <a:t>✓  AI chatbot powered by Google Gemini with RAG</a:t>
             </a:r>
           </a:p>
           <a:p>
@@ -11260,7 +13509,139 @@
               </a:defRPr>
             </a:pPr>
             <a:r>
+              <a:t>✓  Role-based access: User, NGO, Admin</a:t>
+            </a:r>
+          </a:p>
+          <a:p>
+            <a:pPr>
+              <a:spcAft>
+                <a:spcPts val="600"/>
+              </a:spcAft>
+              <a:defRPr sz="1600">
+                <a:solidFill>
+                  <a:srgbClr val="555555"/>
+                </a:solidFill>
+                <a:latin typeface="Calibri"/>
+              </a:defRPr>
+            </a:pPr>
+            <a:r>
               <a:t>✓  Certificate generation for donations &amp; volunteering</a:t>
+            </a:r>
+          </a:p>
+        </p:txBody>
+      </p:sp>
+      <p:sp>
+        <p:nvSpPr>
+          <p:cNvPr id="11" name="Rectangle 10"/>
+          <p:cNvSpPr/>
+          <p:nvPr/>
+        </p:nvSpPr>
+        <p:spPr>
+          <a:xfrm>
+            <a:off x="0" y="6492240"/>
+            <a:ext cx="12191695" cy="9144"/>
+          </a:xfrm>
+          <a:prstGeom prst="rect">
+            <a:avLst/>
+          </a:prstGeom>
+          <a:solidFill>
+            <a:srgbClr val="D9E2EC"/>
+          </a:solidFill>
+          <a:ln>
+            <a:noFill/>
+          </a:ln>
+          <a:effectLst/>
+        </p:spPr>
+        <p:style>
+          <a:lnRef idx="1">
+            <a:schemeClr val="accent1"/>
+          </a:lnRef>
+          <a:fillRef idx="3">
+            <a:schemeClr val="accent1"/>
+          </a:fillRef>
+          <a:effectRef idx="2">
+            <a:schemeClr val="accent1"/>
+          </a:effectRef>
+          <a:fontRef idx="minor">
+            <a:schemeClr val="lt1"/>
+          </a:fontRef>
+        </p:style>
+        <p:txBody>
+          <a:bodyPr rtlCol="0" anchor="ctr"/>
+          <a:lstStyle/>
+          <a:p>
+            <a:pPr algn="ctr"/>
+          </a:p>
+        </p:txBody>
+      </p:sp>
+      <p:sp>
+        <p:nvSpPr>
+          <p:cNvPr id="12" name="TextBox 11"/>
+          <p:cNvSpPr txBox="1"/>
+          <p:nvPr/>
+        </p:nvSpPr>
+        <p:spPr>
+          <a:xfrm>
+            <a:off x="320040" y="6565392"/>
+            <a:ext cx="5943600" cy="228600"/>
+          </a:xfrm>
+          <a:prstGeom prst="rect">
+            <a:avLst/>
+          </a:prstGeom>
+          <a:noFill/>
+        </p:spPr>
+        <p:txBody>
+          <a:bodyPr wrap="square">
+            <a:spAutoFit/>
+          </a:bodyPr>
+          <a:lstStyle/>
+          <a:p>
+            <a:pPr algn="l">
+              <a:defRPr sz="1000" b="0">
+                <a:solidFill>
+                  <a:srgbClr val="555555"/>
+                </a:solidFill>
+                <a:latin typeface="Calibri"/>
+              </a:defRPr>
+            </a:pPr>
+            <a:r>
+              <a:t>NGO-Connect | Architecture, Delivery, and Validation</a:t>
+            </a:r>
+          </a:p>
+        </p:txBody>
+      </p:sp>
+      <p:sp>
+        <p:nvSpPr>
+          <p:cNvPr id="13" name="TextBox 12"/>
+          <p:cNvSpPr txBox="1"/>
+          <p:nvPr/>
+        </p:nvSpPr>
+        <p:spPr>
+          <a:xfrm>
+            <a:off x="9326880" y="6565392"/>
+            <a:ext cx="2468880" cy="228600"/>
+          </a:xfrm>
+          <a:prstGeom prst="rect">
+            <a:avLst/>
+          </a:prstGeom>
+          <a:noFill/>
+        </p:spPr>
+        <p:txBody>
+          <a:bodyPr wrap="square">
+            <a:spAutoFit/>
+          </a:bodyPr>
+          <a:lstStyle/>
+          <a:p>
+            <a:pPr algn="r">
+              <a:defRPr sz="1000" b="0">
+                <a:solidFill>
+                  <a:srgbClr val="555555"/>
+                </a:solidFill>
+                <a:latin typeface="Calibri"/>
+              </a:defRPr>
+            </a:pPr>
+            <a:r>
+              <a:t>Slide 3/25</a:t>
             </a:r>
           </a:p>
         </p:txBody>
@@ -11722,11 +14103,11 @@
               </a:defRPr>
             </a:pPr>
             <a:r>
-              <a:t>Node.js + Express  •  13 Route Modules  •  JWT Middleware</a:t>
+              <a:t>Node.js + Express  •  14 Route Modules  •  JWT Middleware</a:t>
             </a:r>
             <a:br/>
             <a:r>
-              <a:t>Payment Gateway  •  Gemini AI  •  Certificate Engine</a:t>
+              <a:t>Payment Gateway  •  Gemini AI  •  Innovation Services</a:t>
             </a:r>
           </a:p>
         </p:txBody>
@@ -11795,11 +14176,11 @@
               </a:defRPr>
             </a:pPr>
             <a:r>
-              <a:t>PostgreSQL 14+  •  13 Primary Tables + 4 Junction Tables</a:t>
+              <a:t>PostgreSQL 14+  •  35 Relational Tables</a:t>
             </a:r>
             <a:br/>
             <a:r>
-              <a:t>BIGSERIAL PK + UUID External ID  •  JSONB source_doc  •  Relational FKs</a:t>
+              <a:t>BIGSERIAL PK + External ID  •  JSONB source_doc  •  FKs for core + innovation</a:t>
             </a:r>
           </a:p>
         </p:txBody>
@@ -11907,7 +14288,123 @@
               </a:defRPr>
             </a:pPr>
             <a:r>
-              <a:t>External Services:  Razorpay Payment API  •  Google Gemini API (gemini-2.5-flash)</a:t>
+              <a:t>External Services:  Razorpay Payment API  •  Google Gemini API  •  Webhook Delivery Service</a:t>
+            </a:r>
+          </a:p>
+        </p:txBody>
+      </p:sp>
+      <p:sp>
+        <p:nvSpPr>
+          <p:cNvPr id="11" name="Rectangle 10"/>
+          <p:cNvSpPr/>
+          <p:nvPr/>
+        </p:nvSpPr>
+        <p:spPr>
+          <a:xfrm>
+            <a:off x="0" y="6492240"/>
+            <a:ext cx="12191695" cy="9144"/>
+          </a:xfrm>
+          <a:prstGeom prst="rect">
+            <a:avLst/>
+          </a:prstGeom>
+          <a:solidFill>
+            <a:srgbClr val="D9E2EC"/>
+          </a:solidFill>
+          <a:ln>
+            <a:noFill/>
+          </a:ln>
+          <a:effectLst/>
+        </p:spPr>
+        <p:style>
+          <a:lnRef idx="1">
+            <a:schemeClr val="accent1"/>
+          </a:lnRef>
+          <a:fillRef idx="3">
+            <a:schemeClr val="accent1"/>
+          </a:fillRef>
+          <a:effectRef idx="2">
+            <a:schemeClr val="accent1"/>
+          </a:effectRef>
+          <a:fontRef idx="minor">
+            <a:schemeClr val="lt1"/>
+          </a:fontRef>
+        </p:style>
+        <p:txBody>
+          <a:bodyPr rtlCol="0" anchor="ctr"/>
+          <a:lstStyle/>
+          <a:p>
+            <a:pPr algn="ctr"/>
+          </a:p>
+        </p:txBody>
+      </p:sp>
+      <p:sp>
+        <p:nvSpPr>
+          <p:cNvPr id="12" name="TextBox 11"/>
+          <p:cNvSpPr txBox="1"/>
+          <p:nvPr/>
+        </p:nvSpPr>
+        <p:spPr>
+          <a:xfrm>
+            <a:off x="320040" y="6565392"/>
+            <a:ext cx="5943600" cy="228600"/>
+          </a:xfrm>
+          <a:prstGeom prst="rect">
+            <a:avLst/>
+          </a:prstGeom>
+          <a:noFill/>
+        </p:spPr>
+        <p:txBody>
+          <a:bodyPr wrap="square">
+            <a:spAutoFit/>
+          </a:bodyPr>
+          <a:lstStyle/>
+          <a:p>
+            <a:pPr algn="l">
+              <a:defRPr sz="1000" b="0">
+                <a:solidFill>
+                  <a:srgbClr val="555555"/>
+                </a:solidFill>
+                <a:latin typeface="Calibri"/>
+              </a:defRPr>
+            </a:pPr>
+            <a:r>
+              <a:t>NGO-Connect | Architecture, Delivery, and Validation</a:t>
+            </a:r>
+          </a:p>
+        </p:txBody>
+      </p:sp>
+      <p:sp>
+        <p:nvSpPr>
+          <p:cNvPr id="13" name="TextBox 12"/>
+          <p:cNvSpPr txBox="1"/>
+          <p:nvPr/>
+        </p:nvSpPr>
+        <p:spPr>
+          <a:xfrm>
+            <a:off x="9326880" y="6565392"/>
+            <a:ext cx="2468880" cy="228600"/>
+          </a:xfrm>
+          <a:prstGeom prst="rect">
+            <a:avLst/>
+          </a:prstGeom>
+          <a:noFill/>
+        </p:spPr>
+        <p:txBody>
+          <a:bodyPr wrap="square">
+            <a:spAutoFit/>
+          </a:bodyPr>
+          <a:lstStyle/>
+          <a:p>
+            <a:pPr algn="r">
+              <a:defRPr sz="1000" b="0">
+                <a:solidFill>
+                  <a:srgbClr val="555555"/>
+                </a:solidFill>
+                <a:latin typeface="Calibri"/>
+              </a:defRPr>
+            </a:pPr>
+            <a:r>
+              <a:t>Slide 5/25</a:t>
             </a:r>
           </a:p>
         </p:txBody>
@@ -12124,7 +14621,7 @@
               </a:defRPr>
             </a:pPr>
             <a:r>
-              <a:t>Node.js + Express ^4.22</a:t>
+              <a:t>Node.js + Express</a:t>
             </a:r>
           </a:p>
           <a:p>
@@ -12140,7 +14637,7 @@
               </a:defRPr>
             </a:pPr>
             <a:r>
-              <a:t>PostgreSQL 14+ (pg ^8.16)</a:t>
+              <a:t>PostgreSQL 14+ (pg driver)</a:t>
             </a:r>
           </a:p>
           <a:p>
@@ -12156,7 +14653,7 @@
               </a:defRPr>
             </a:pPr>
             <a:r>
-              <a:t>JWT Auth (jsonwebtoken ^9.0)</a:t>
+              <a:t>JWT Auth (jsonwebtoken)</a:t>
             </a:r>
           </a:p>
           <a:p>
@@ -12172,7 +14669,7 @@
               </a:defRPr>
             </a:pPr>
             <a:r>
-              <a:t>bcryptjs ^2.4 (password hashing)</a:t>
+              <a:t>bcryptjs (password hashing)</a:t>
             </a:r>
           </a:p>
           <a:p>
@@ -12188,7 +14685,7 @@
               </a:defRPr>
             </a:pPr>
             <a:r>
-              <a:t>Multer ^1.4 (file uploads)</a:t>
+              <a:t>Multer (file uploads)</a:t>
             </a:r>
           </a:p>
           <a:p>
@@ -12204,7 +14701,7 @@
               </a:defRPr>
             </a:pPr>
             <a:r>
-              <a:t>Google Generative AI ^0.24</a:t>
+              <a:t>Google Generative AI (Gemini)</a:t>
             </a:r>
           </a:p>
           <a:p>
@@ -12311,7 +14808,7 @@
               </a:defRPr>
             </a:pPr>
             <a:r>
-              <a:t>React ^18.2 + React Router v6</a:t>
+              <a:t>React 18 + React Router v6</a:t>
             </a:r>
           </a:p>
           <a:p>
@@ -12327,7 +14824,7 @@
               </a:defRPr>
             </a:pPr>
             <a:r>
-              <a:t>Axios ^1.4 (HTTP client)</a:t>
+              <a:t>Axios (HTTP client)</a:t>
             </a:r>
           </a:p>
           <a:p>
@@ -12343,7 +14840,7 @@
               </a:defRPr>
             </a:pPr>
             <a:r>
-              <a:t>Tailwind CSS ^3.4</a:t>
+              <a:t>Tailwind CSS</a:t>
             </a:r>
           </a:p>
           <a:p>
@@ -12359,7 +14856,7 @@
               </a:defRPr>
             </a:pPr>
             <a:r>
-              <a:t>Recharts ^2.8 (data viz)</a:t>
+              <a:t>Recharts (data viz)</a:t>
             </a:r>
           </a:p>
           <a:p>
@@ -12375,7 +14872,7 @@
               </a:defRPr>
             </a:pPr>
             <a:r>
-              <a:t>Leaflet ^1.9 + react-leaflet ^4.2</a:t>
+              <a:t>Leaflet + react-leaflet</a:t>
             </a:r>
           </a:p>
           <a:p>
@@ -12391,7 +14888,7 @@
               </a:defRPr>
             </a:pPr>
             <a:r>
-              <a:t>leaflet-routing-machine ^3.2</a:t>
+              <a:t>leaflet-routing-machine</a:t>
             </a:r>
           </a:p>
           <a:p>
@@ -12407,7 +14904,7 @@
               </a:defRPr>
             </a:pPr>
             <a:r>
-              <a:t>Heroicons ^1.0 (icons)</a:t>
+              <a:t>Heroicons (icons)</a:t>
             </a:r>
           </a:p>
           <a:p>
@@ -12423,7 +14920,7 @@
               </a:defRPr>
             </a:pPr>
             <a:r>
-              <a:t>react-scripts ^5.0 (CRA toolchain)</a:t>
+              <a:t>react-scripts (CRA toolchain)</a:t>
             </a:r>
           </a:p>
         </p:txBody>
@@ -12468,6 +14965,122 @@
           <a:lstStyle/>
           <a:p>
             <a:pPr algn="ctr"/>
+          </a:p>
+        </p:txBody>
+      </p:sp>
+      <p:sp>
+        <p:nvSpPr>
+          <p:cNvPr id="10" name="Rectangle 9"/>
+          <p:cNvSpPr/>
+          <p:nvPr/>
+        </p:nvSpPr>
+        <p:spPr>
+          <a:xfrm>
+            <a:off x="0" y="6492240"/>
+            <a:ext cx="12191695" cy="9144"/>
+          </a:xfrm>
+          <a:prstGeom prst="rect">
+            <a:avLst/>
+          </a:prstGeom>
+          <a:solidFill>
+            <a:srgbClr val="D9E2EC"/>
+          </a:solidFill>
+          <a:ln>
+            <a:noFill/>
+          </a:ln>
+          <a:effectLst/>
+        </p:spPr>
+        <p:style>
+          <a:lnRef idx="1">
+            <a:schemeClr val="accent1"/>
+          </a:lnRef>
+          <a:fillRef idx="3">
+            <a:schemeClr val="accent1"/>
+          </a:fillRef>
+          <a:effectRef idx="2">
+            <a:schemeClr val="accent1"/>
+          </a:effectRef>
+          <a:fontRef idx="minor">
+            <a:schemeClr val="lt1"/>
+          </a:fontRef>
+        </p:style>
+        <p:txBody>
+          <a:bodyPr rtlCol="0" anchor="ctr"/>
+          <a:lstStyle/>
+          <a:p>
+            <a:pPr algn="ctr"/>
+          </a:p>
+        </p:txBody>
+      </p:sp>
+      <p:sp>
+        <p:nvSpPr>
+          <p:cNvPr id="11" name="TextBox 10"/>
+          <p:cNvSpPr txBox="1"/>
+          <p:nvPr/>
+        </p:nvSpPr>
+        <p:spPr>
+          <a:xfrm>
+            <a:off x="320040" y="6565392"/>
+            <a:ext cx="5943600" cy="228600"/>
+          </a:xfrm>
+          <a:prstGeom prst="rect">
+            <a:avLst/>
+          </a:prstGeom>
+          <a:noFill/>
+        </p:spPr>
+        <p:txBody>
+          <a:bodyPr wrap="square">
+            <a:spAutoFit/>
+          </a:bodyPr>
+          <a:lstStyle/>
+          <a:p>
+            <a:pPr algn="l">
+              <a:defRPr sz="1000" b="0">
+                <a:solidFill>
+                  <a:srgbClr val="555555"/>
+                </a:solidFill>
+                <a:latin typeface="Calibri"/>
+              </a:defRPr>
+            </a:pPr>
+            <a:r>
+              <a:t>NGO-Connect | Architecture, Delivery, and Validation</a:t>
+            </a:r>
+          </a:p>
+        </p:txBody>
+      </p:sp>
+      <p:sp>
+        <p:nvSpPr>
+          <p:cNvPr id="12" name="TextBox 11"/>
+          <p:cNvSpPr txBox="1"/>
+          <p:nvPr/>
+        </p:nvSpPr>
+        <p:spPr>
+          <a:xfrm>
+            <a:off x="9326880" y="6565392"/>
+            <a:ext cx="2468880" cy="228600"/>
+          </a:xfrm>
+          <a:prstGeom prst="rect">
+            <a:avLst/>
+          </a:prstGeom>
+          <a:noFill/>
+        </p:spPr>
+        <p:txBody>
+          <a:bodyPr wrap="square">
+            <a:spAutoFit/>
+          </a:bodyPr>
+          <a:lstStyle/>
+          <a:p>
+            <a:pPr algn="r">
+              <a:defRPr sz="1000" b="0">
+                <a:solidFill>
+                  <a:srgbClr val="555555"/>
+                </a:solidFill>
+                <a:latin typeface="Calibri"/>
+              </a:defRPr>
+            </a:pPr>
+            <a:r>
+              <a:t>Slide 6/25</a:t>
+            </a:r>
           </a:p>
         </p:txBody>
       </p:sp>
@@ -12761,7 +15374,7 @@
               </a:defRPr>
             </a:pPr>
             <a:r>
-              <a:t>Submit help requests to NGOs</a:t>
+              <a:t>Use Innovation Center (circles, wishlists)</a:t>
             </a:r>
           </a:p>
           <a:p>
@@ -12946,7 +15559,7 @@
               </a:defRPr>
             </a:pPr>
             <a:r>
-              <a:t>Review &amp; approve certificate requests</a:t>
+              <a:t>Manage Innovation Center modules</a:t>
             </a:r>
           </a:p>
           <a:p>
@@ -12962,7 +15575,7 @@
               </a:defRPr>
             </a:pPr>
             <a:r>
-              <a:t>Process help requests from users</a:t>
+              <a:t>Review &amp; approve certificate requests</a:t>
             </a:r>
           </a:p>
           <a:p>
@@ -13147,7 +15760,7 @@
               </a:defRPr>
             </a:pPr>
             <a:r>
-              <a:t>Platform analytics &amp; dashboard (JSON + SSR HTML)</a:t>
+              <a:t>Platform analytics &amp; webhook dashboard</a:t>
             </a:r>
           </a:p>
           <a:p>
@@ -13200,6 +15813,122 @@
             </a:pPr>
             <a:r>
               <a:t>Auth: Stateless JWT (7-day expiry)  •  bcrypt password hashing  •  Role-checked middleware on every route</a:t>
+            </a:r>
+          </a:p>
+        </p:txBody>
+      </p:sp>
+      <p:sp>
+        <p:nvSpPr>
+          <p:cNvPr id="15" name="Rectangle 14"/>
+          <p:cNvSpPr/>
+          <p:nvPr/>
+        </p:nvSpPr>
+        <p:spPr>
+          <a:xfrm>
+            <a:off x="0" y="6492240"/>
+            <a:ext cx="12191695" cy="9144"/>
+          </a:xfrm>
+          <a:prstGeom prst="rect">
+            <a:avLst/>
+          </a:prstGeom>
+          <a:solidFill>
+            <a:srgbClr val="D9E2EC"/>
+          </a:solidFill>
+          <a:ln>
+            <a:noFill/>
+          </a:ln>
+          <a:effectLst/>
+        </p:spPr>
+        <p:style>
+          <a:lnRef idx="1">
+            <a:schemeClr val="accent1"/>
+          </a:lnRef>
+          <a:fillRef idx="3">
+            <a:schemeClr val="accent1"/>
+          </a:fillRef>
+          <a:effectRef idx="2">
+            <a:schemeClr val="accent1"/>
+          </a:effectRef>
+          <a:fontRef idx="minor">
+            <a:schemeClr val="lt1"/>
+          </a:fontRef>
+        </p:style>
+        <p:txBody>
+          <a:bodyPr rtlCol="0" anchor="ctr"/>
+          <a:lstStyle/>
+          <a:p>
+            <a:pPr algn="ctr"/>
+          </a:p>
+        </p:txBody>
+      </p:sp>
+      <p:sp>
+        <p:nvSpPr>
+          <p:cNvPr id="16" name="TextBox 15"/>
+          <p:cNvSpPr txBox="1"/>
+          <p:nvPr/>
+        </p:nvSpPr>
+        <p:spPr>
+          <a:xfrm>
+            <a:off x="320040" y="6565392"/>
+            <a:ext cx="5943600" cy="228600"/>
+          </a:xfrm>
+          <a:prstGeom prst="rect">
+            <a:avLst/>
+          </a:prstGeom>
+          <a:noFill/>
+        </p:spPr>
+        <p:txBody>
+          <a:bodyPr wrap="square">
+            <a:spAutoFit/>
+          </a:bodyPr>
+          <a:lstStyle/>
+          <a:p>
+            <a:pPr algn="l">
+              <a:defRPr sz="1000" b="0">
+                <a:solidFill>
+                  <a:srgbClr val="555555"/>
+                </a:solidFill>
+                <a:latin typeface="Calibri"/>
+              </a:defRPr>
+            </a:pPr>
+            <a:r>
+              <a:t>NGO-Connect | Architecture, Delivery, and Validation</a:t>
+            </a:r>
+          </a:p>
+        </p:txBody>
+      </p:sp>
+      <p:sp>
+        <p:nvSpPr>
+          <p:cNvPr id="17" name="TextBox 16"/>
+          <p:cNvSpPr txBox="1"/>
+          <p:nvPr/>
+        </p:nvSpPr>
+        <p:spPr>
+          <a:xfrm>
+            <a:off x="9326880" y="6565392"/>
+            <a:ext cx="2468880" cy="228600"/>
+          </a:xfrm>
+          <a:prstGeom prst="rect">
+            <a:avLst/>
+          </a:prstGeom>
+          <a:noFill/>
+        </p:spPr>
+        <p:txBody>
+          <a:bodyPr wrap="square">
+            <a:spAutoFit/>
+          </a:bodyPr>
+          <a:lstStyle/>
+          <a:p>
+            <a:pPr algn="r">
+              <a:defRPr sz="1000" b="0">
+                <a:solidFill>
+                  <a:srgbClr val="555555"/>
+                </a:solidFill>
+                <a:latin typeface="Calibri"/>
+              </a:defRPr>
+            </a:pPr>
+            <a:r>
+              <a:t>Slide 7/25</a:t>
             </a:r>
           </a:p>
         </p:txBody>
@@ -13377,7 +16106,7 @@
               </a:defRPr>
             </a:pPr>
             <a:r>
-              <a:t>Donations • Volunteering • Messaging • Moderation • AI</a:t>
+              <a:t>Donations • Volunteering • Innovation • Moderation • AI</a:t>
             </a:r>
           </a:p>
         </p:txBody>
@@ -13967,7 +16696,7 @@
               </a:defRPr>
             </a:pPr>
             <a:r>
-              <a:t>Help Requests</a:t>
+              <a:t>Innovation Center</a:t>
             </a:r>
           </a:p>
         </p:txBody>
@@ -14003,11 +16732,11 @@
               </a:defRPr>
             </a:pPr>
             <a:r>
-              <a:t>Users submit support requests to NGOs with</a:t>
+              <a:t>Giving circles, wishlists, volunteer shifts, CRM,</a:t>
             </a:r>
             <a:br/>
             <a:r>
-              <a:t>status workflow: Pending → Approved → Completed</a:t>
+              <a:t>corporate matching, impact updates, gamification</a:t>
             </a:r>
           </a:p>
         </p:txBody>
@@ -14252,6 +16981,122 @@
             <a:br/>
             <a:r>
               <a:t>campaign classification, fraud scoring, volunteer matching</a:t>
+            </a:r>
+          </a:p>
+        </p:txBody>
+      </p:sp>
+      <p:sp>
+        <p:nvSpPr>
+          <p:cNvPr id="23" name="Rectangle 22"/>
+          <p:cNvSpPr/>
+          <p:nvPr/>
+        </p:nvSpPr>
+        <p:spPr>
+          <a:xfrm>
+            <a:off x="0" y="6492240"/>
+            <a:ext cx="12191695" cy="9144"/>
+          </a:xfrm>
+          <a:prstGeom prst="rect">
+            <a:avLst/>
+          </a:prstGeom>
+          <a:solidFill>
+            <a:srgbClr val="D9E2EC"/>
+          </a:solidFill>
+          <a:ln>
+            <a:noFill/>
+          </a:ln>
+          <a:effectLst/>
+        </p:spPr>
+        <p:style>
+          <a:lnRef idx="1">
+            <a:schemeClr val="accent1"/>
+          </a:lnRef>
+          <a:fillRef idx="3">
+            <a:schemeClr val="accent1"/>
+          </a:fillRef>
+          <a:effectRef idx="2">
+            <a:schemeClr val="accent1"/>
+          </a:effectRef>
+          <a:fontRef idx="minor">
+            <a:schemeClr val="lt1"/>
+          </a:fontRef>
+        </p:style>
+        <p:txBody>
+          <a:bodyPr rtlCol="0" anchor="ctr"/>
+          <a:lstStyle/>
+          <a:p>
+            <a:pPr algn="ctr"/>
+          </a:p>
+        </p:txBody>
+      </p:sp>
+      <p:sp>
+        <p:nvSpPr>
+          <p:cNvPr id="24" name="TextBox 23"/>
+          <p:cNvSpPr txBox="1"/>
+          <p:nvPr/>
+        </p:nvSpPr>
+        <p:spPr>
+          <a:xfrm>
+            <a:off x="320040" y="6565392"/>
+            <a:ext cx="5943600" cy="228600"/>
+          </a:xfrm>
+          <a:prstGeom prst="rect">
+            <a:avLst/>
+          </a:prstGeom>
+          <a:noFill/>
+        </p:spPr>
+        <p:txBody>
+          <a:bodyPr wrap="square">
+            <a:spAutoFit/>
+          </a:bodyPr>
+          <a:lstStyle/>
+          <a:p>
+            <a:pPr algn="l">
+              <a:defRPr sz="1000" b="0">
+                <a:solidFill>
+                  <a:srgbClr val="555555"/>
+                </a:solidFill>
+                <a:latin typeface="Calibri"/>
+              </a:defRPr>
+            </a:pPr>
+            <a:r>
+              <a:t>NGO-Connect | Architecture, Delivery, and Validation</a:t>
+            </a:r>
+          </a:p>
+        </p:txBody>
+      </p:sp>
+      <p:sp>
+        <p:nvSpPr>
+          <p:cNvPr id="25" name="TextBox 24"/>
+          <p:cNvSpPr txBox="1"/>
+          <p:nvPr/>
+        </p:nvSpPr>
+        <p:spPr>
+          <a:xfrm>
+            <a:off x="9326880" y="6565392"/>
+            <a:ext cx="2468880" cy="228600"/>
+          </a:xfrm>
+          <a:prstGeom prst="rect">
+            <a:avLst/>
+          </a:prstGeom>
+          <a:noFill/>
+        </p:spPr>
+        <p:txBody>
+          <a:bodyPr wrap="square">
+            <a:spAutoFit/>
+          </a:bodyPr>
+          <a:lstStyle/>
+          <a:p>
+            <a:pPr algn="r">
+              <a:defRPr sz="1000" b="0">
+                <a:solidFill>
+                  <a:srgbClr val="555555"/>
+                </a:solidFill>
+                <a:latin typeface="Calibri"/>
+              </a:defRPr>
+            </a:pPr>
+            <a:r>
+              <a:t>Slide 9/25</a:t>
             </a:r>
           </a:p>
         </p:txBody>
